--- a/BAO_CAO_PBL.pptx
+++ b/BAO_CAO_PBL.pptx
@@ -5,7 +5,7 @@
     <p:sldMasterId id="2147483660" r:id="rId4"/>
   </p:sldMasterIdLst>
   <p:notesMasterIdLst>
-    <p:notesMasterId r:id="rId16"/>
+    <p:notesMasterId r:id="rId18"/>
   </p:notesMasterIdLst>
   <p:sldIdLst>
     <p:sldId id="257" r:id="rId5"/>
@@ -19,6 +19,8 @@
     <p:sldId id="307" r:id="rId13"/>
     <p:sldId id="308" r:id="rId14"/>
     <p:sldId id="309" r:id="rId15"/>
+    <p:sldId id="312" r:id="rId16"/>
+    <p:sldId id="313" r:id="rId17"/>
   </p:sldIdLst>
   <p:sldSz cx="12192000" cy="6858000"/>
   <p:notesSz cx="6858000" cy="9144000"/>
@@ -207,7 +209,7 @@
           <a:p>
             <a:fld id="{9E996FB7-011D-423E-B5E1-05A3A33F8A4A}" type="datetimeFigureOut">
               <a:rPr lang="en-US" smtClean="0"/>
-              <a:t>5/28/2024</a:t>
+              <a:t>5/30/2024</a:t>
             </a:fld>
             <a:endParaRPr lang="en-US"/>
           </a:p>
@@ -787,6 +789,224 @@
     <p:extLst>
       <p:ext uri="{BB962C8B-B14F-4D97-AF65-F5344CB8AC3E}">
         <p14:creationId xmlns:p14="http://schemas.microsoft.com/office/powerpoint/2010/main" val="3710467807"/>
+      </p:ext>
+    </p:extLst>
+  </p:cSld>
+  <p:clrMapOvr>
+    <a:masterClrMapping/>
+  </p:clrMapOvr>
+</p:notes>
+</file>
+
+<file path=ppt/notesSlides/notesSlide12.xml><?xml version="1.0" encoding="utf-8"?>
+<p:notes xmlns:a="http://schemas.openxmlformats.org/drawingml/2006/main" xmlns:r="http://schemas.openxmlformats.org/officeDocument/2006/relationships" xmlns:p="http://schemas.openxmlformats.org/presentationml/2006/main" showMasterSp="0" showMasterPhAnim="0">
+  <p:cSld>
+    <p:spTree>
+      <p:nvGrpSpPr>
+        <p:cNvPr id="1" name="Shape 79"/>
+        <p:cNvGrpSpPr/>
+        <p:nvPr/>
+      </p:nvGrpSpPr>
+      <p:grpSpPr>
+        <a:xfrm>
+          <a:off x="0" y="0"/>
+          <a:ext cx="0" cy="0"/>
+          <a:chOff x="0" y="0"/>
+          <a:chExt cx="0" cy="0"/>
+        </a:xfrm>
+      </p:grpSpPr>
+      <p:sp>
+        <p:nvSpPr>
+          <p:cNvPr id="80" name="Google Shape;80;g35f391192_04:notes"/>
+          <p:cNvSpPr>
+            <a:spLocks noGrp="1" noRot="1" noChangeAspect="1"/>
+          </p:cNvSpPr>
+          <p:nvPr>
+            <p:ph type="sldImg" idx="2"/>
+          </p:nvPr>
+        </p:nvSpPr>
+        <p:spPr>
+          <a:xfrm>
+            <a:off x="381000" y="685800"/>
+            <a:ext cx="6096000" cy="3429000"/>
+          </a:xfrm>
+          <a:custGeom>
+            <a:avLst/>
+            <a:gdLst/>
+            <a:ahLst/>
+            <a:cxnLst/>
+            <a:rect l="l" t="t" r="r" b="b"/>
+            <a:pathLst>
+              <a:path w="120000" h="120000" extrusionOk="0">
+                <a:moveTo>
+                  <a:pt x="0" y="0"/>
+                </a:moveTo>
+                <a:lnTo>
+                  <a:pt x="120000" y="0"/>
+                </a:lnTo>
+                <a:lnTo>
+                  <a:pt x="120000" y="120000"/>
+                </a:lnTo>
+                <a:lnTo>
+                  <a:pt x="0" y="120000"/>
+                </a:lnTo>
+                <a:close/>
+              </a:path>
+            </a:pathLst>
+          </a:custGeom>
+        </p:spPr>
+      </p:sp>
+      <p:sp>
+        <p:nvSpPr>
+          <p:cNvPr id="81" name="Google Shape;81;g35f391192_04:notes"/>
+          <p:cNvSpPr txBox="1">
+            <a:spLocks noGrp="1"/>
+          </p:cNvSpPr>
+          <p:nvPr>
+            <p:ph type="body" idx="1"/>
+          </p:nvPr>
+        </p:nvSpPr>
+        <p:spPr>
+          <a:xfrm>
+            <a:off x="685800" y="4343400"/>
+            <a:ext cx="5486400" cy="4114800"/>
+          </a:xfrm>
+          <a:prstGeom prst="rect">
+            <a:avLst/>
+          </a:prstGeom>
+        </p:spPr>
+        <p:txBody>
+          <a:bodyPr spcFirstLastPara="1" wrap="square" lIns="91425" tIns="91425" rIns="91425" bIns="91425" anchor="t" anchorCtr="0">
+            <a:noAutofit/>
+          </a:bodyPr>
+          <a:lstStyle/>
+          <a:p>
+            <a:pPr marL="0" lvl="0" indent="0" algn="l" rtl="0">
+              <a:spcBef>
+                <a:spcPts val="0"/>
+              </a:spcBef>
+              <a:spcAft>
+                <a:spcPts val="0"/>
+              </a:spcAft>
+              <a:buNone/>
+            </a:pPr>
+            <a:endParaRPr/>
+          </a:p>
+        </p:txBody>
+      </p:sp>
+    </p:spTree>
+    <p:extLst>
+      <p:ext uri="{BB962C8B-B14F-4D97-AF65-F5344CB8AC3E}">
+        <p14:creationId xmlns:p14="http://schemas.microsoft.com/office/powerpoint/2010/main" val="772879435"/>
+      </p:ext>
+    </p:extLst>
+  </p:cSld>
+  <p:clrMapOvr>
+    <a:masterClrMapping/>
+  </p:clrMapOvr>
+</p:notes>
+</file>
+
+<file path=ppt/notesSlides/notesSlide13.xml><?xml version="1.0" encoding="utf-8"?>
+<p:notes xmlns:a="http://schemas.openxmlformats.org/drawingml/2006/main" xmlns:r="http://schemas.openxmlformats.org/officeDocument/2006/relationships" xmlns:p="http://schemas.openxmlformats.org/presentationml/2006/main" showMasterSp="0" showMasterPhAnim="0">
+  <p:cSld>
+    <p:spTree>
+      <p:nvGrpSpPr>
+        <p:cNvPr id="1" name="Shape 79"/>
+        <p:cNvGrpSpPr/>
+        <p:nvPr/>
+      </p:nvGrpSpPr>
+      <p:grpSpPr>
+        <a:xfrm>
+          <a:off x="0" y="0"/>
+          <a:ext cx="0" cy="0"/>
+          <a:chOff x="0" y="0"/>
+          <a:chExt cx="0" cy="0"/>
+        </a:xfrm>
+      </p:grpSpPr>
+      <p:sp>
+        <p:nvSpPr>
+          <p:cNvPr id="80" name="Google Shape;80;g35f391192_04:notes"/>
+          <p:cNvSpPr>
+            <a:spLocks noGrp="1" noRot="1" noChangeAspect="1"/>
+          </p:cNvSpPr>
+          <p:nvPr>
+            <p:ph type="sldImg" idx="2"/>
+          </p:nvPr>
+        </p:nvSpPr>
+        <p:spPr>
+          <a:xfrm>
+            <a:off x="381000" y="685800"/>
+            <a:ext cx="6096000" cy="3429000"/>
+          </a:xfrm>
+          <a:custGeom>
+            <a:avLst/>
+            <a:gdLst/>
+            <a:ahLst/>
+            <a:cxnLst/>
+            <a:rect l="l" t="t" r="r" b="b"/>
+            <a:pathLst>
+              <a:path w="120000" h="120000" extrusionOk="0">
+                <a:moveTo>
+                  <a:pt x="0" y="0"/>
+                </a:moveTo>
+                <a:lnTo>
+                  <a:pt x="120000" y="0"/>
+                </a:lnTo>
+                <a:lnTo>
+                  <a:pt x="120000" y="120000"/>
+                </a:lnTo>
+                <a:lnTo>
+                  <a:pt x="0" y="120000"/>
+                </a:lnTo>
+                <a:close/>
+              </a:path>
+            </a:pathLst>
+          </a:custGeom>
+        </p:spPr>
+      </p:sp>
+      <p:sp>
+        <p:nvSpPr>
+          <p:cNvPr id="81" name="Google Shape;81;g35f391192_04:notes"/>
+          <p:cNvSpPr txBox="1">
+            <a:spLocks noGrp="1"/>
+          </p:cNvSpPr>
+          <p:nvPr>
+            <p:ph type="body" idx="1"/>
+          </p:nvPr>
+        </p:nvSpPr>
+        <p:spPr>
+          <a:xfrm>
+            <a:off x="685800" y="4343400"/>
+            <a:ext cx="5486400" cy="4114800"/>
+          </a:xfrm>
+          <a:prstGeom prst="rect">
+            <a:avLst/>
+          </a:prstGeom>
+        </p:spPr>
+        <p:txBody>
+          <a:bodyPr spcFirstLastPara="1" wrap="square" lIns="91425" tIns="91425" rIns="91425" bIns="91425" anchor="t" anchorCtr="0">
+            <a:noAutofit/>
+          </a:bodyPr>
+          <a:lstStyle/>
+          <a:p>
+            <a:pPr marL="0" lvl="0" indent="0" algn="l" rtl="0">
+              <a:spcBef>
+                <a:spcPts val="0"/>
+              </a:spcBef>
+              <a:spcAft>
+                <a:spcPts val="0"/>
+              </a:spcAft>
+              <a:buNone/>
+            </a:pPr>
+            <a:endParaRPr/>
+          </a:p>
+        </p:txBody>
+      </p:sp>
+    </p:spTree>
+    <p:extLst>
+      <p:ext uri="{BB962C8B-B14F-4D97-AF65-F5344CB8AC3E}">
+        <p14:creationId xmlns:p14="http://schemas.microsoft.com/office/powerpoint/2010/main" val="3746486601"/>
       </p:ext>
     </p:extLst>
   </p:cSld>
@@ -6052,7 +6272,7 @@
         </p:nvSpPr>
         <p:spPr>
           <a:xfrm>
-            <a:off x="1517245" y="3429000"/>
+            <a:off x="1432629" y="3429000"/>
             <a:ext cx="7354168" cy="1546400"/>
           </a:xfrm>
           <a:prstGeom prst="rect">
@@ -8095,6 +8315,600 @@
     <p:extLst>
       <p:ext uri="{BB962C8B-B14F-4D97-AF65-F5344CB8AC3E}">
         <p14:creationId xmlns:p14="http://schemas.microsoft.com/office/powerpoint/2010/main" val="1330651559"/>
+      </p:ext>
+    </p:extLst>
+  </p:cSld>
+  <p:clrMapOvr>
+    <a:masterClrMapping/>
+  </p:clrMapOvr>
+</p:sld>
+</file>
+
+<file path=ppt/slides/slide12.xml><?xml version="1.0" encoding="utf-8"?>
+<p:sld xmlns:a="http://schemas.openxmlformats.org/drawingml/2006/main" xmlns:r="http://schemas.openxmlformats.org/officeDocument/2006/relationships" xmlns:p="http://schemas.openxmlformats.org/presentationml/2006/main">
+  <p:cSld>
+    <p:spTree>
+      <p:nvGrpSpPr>
+        <p:cNvPr id="1" name="Shape 82"/>
+        <p:cNvGrpSpPr/>
+        <p:nvPr/>
+      </p:nvGrpSpPr>
+      <p:grpSpPr>
+        <a:xfrm>
+          <a:off x="0" y="0"/>
+          <a:ext cx="0" cy="0"/>
+          <a:chOff x="0" y="0"/>
+          <a:chExt cx="0" cy="0"/>
+        </a:xfrm>
+      </p:grpSpPr>
+      <p:sp>
+        <p:nvSpPr>
+          <p:cNvPr id="83" name="Google Shape;83;p14"/>
+          <p:cNvSpPr txBox="1">
+            <a:spLocks noGrp="1"/>
+          </p:cNvSpPr>
+          <p:nvPr>
+            <p:ph type="ctrTitle" idx="4294967295"/>
+          </p:nvPr>
+        </p:nvSpPr>
+        <p:spPr>
+          <a:xfrm>
+            <a:off x="829056" y="731520"/>
+            <a:ext cx="10533887" cy="1362456"/>
+          </a:xfrm>
+          <a:prstGeom prst="rect">
+            <a:avLst/>
+          </a:prstGeom>
+        </p:spPr>
+        <p:txBody>
+          <a:bodyPr spcFirstLastPara="1" wrap="square" lIns="121900" tIns="121900" rIns="121900" bIns="121900" anchor="b" anchorCtr="0">
+            <a:noAutofit/>
+          </a:bodyPr>
+          <a:lstStyle/>
+          <a:p>
+            <a:r>
+              <a:rPr lang="en-US"/>
+              <a:t>2. Xây dựng DQN đơn giản để huấn luyện dựa trên môi trường.</a:t>
+            </a:r>
+            <a:endParaRPr/>
+          </a:p>
+        </p:txBody>
+      </p:sp>
+      <p:sp>
+        <p:nvSpPr>
+          <p:cNvPr id="86" name="Google Shape;86;p14"/>
+          <p:cNvSpPr txBox="1">
+            <a:spLocks noGrp="1"/>
+          </p:cNvSpPr>
+          <p:nvPr>
+            <p:ph type="sldNum" idx="12"/>
+          </p:nvPr>
+        </p:nvSpPr>
+        <p:spPr>
+          <a:xfrm>
+            <a:off x="10879332" y="5857704"/>
+            <a:ext cx="731600" cy="524800"/>
+          </a:xfrm>
+          <a:prstGeom prst="rect">
+            <a:avLst/>
+          </a:prstGeom>
+        </p:spPr>
+        <p:txBody>
+          <a:bodyPr spcFirstLastPara="1" wrap="square" lIns="121900" tIns="121900" rIns="121900" bIns="121900" anchor="ctr" anchorCtr="0">
+            <a:noAutofit/>
+          </a:bodyPr>
+          <a:lstStyle/>
+          <a:p>
+            <a:pPr defTabSz="1219170">
+              <a:buClr>
+                <a:srgbClr val="000000"/>
+              </a:buClr>
+            </a:pPr>
+            <a:fld id="{00000000-1234-1234-1234-123412341234}" type="slidenum">
+              <a:rPr lang="en" kern="0">
+                <a:solidFill>
+                  <a:srgbClr val="000000"/>
+                </a:solidFill>
+              </a:rPr>
+              <a:pPr defTabSz="1219170">
+                <a:buClr>
+                  <a:srgbClr val="000000"/>
+                </a:buClr>
+              </a:pPr>
+              <a:t>12</a:t>
+            </a:fld>
+            <a:endParaRPr kern="0">
+              <a:solidFill>
+                <a:srgbClr val="000000"/>
+              </a:solidFill>
+            </a:endParaRPr>
+          </a:p>
+        </p:txBody>
+      </p:sp>
+      <p:sp>
+        <p:nvSpPr>
+          <p:cNvPr id="6" name="TextBox 5">
+            <a:extLst>
+              <a:ext uri="{FF2B5EF4-FFF2-40B4-BE49-F238E27FC236}">
+                <a16:creationId xmlns:a16="http://schemas.microsoft.com/office/drawing/2014/main" id="{52929F12-8803-7E23-72DD-E3D8CE88CFBE}"/>
+              </a:ext>
+            </a:extLst>
+          </p:cNvPr>
+          <p:cNvSpPr txBox="1"/>
+          <p:nvPr/>
+        </p:nvSpPr>
+        <p:spPr>
+          <a:xfrm>
+            <a:off x="980179" y="2093976"/>
+            <a:ext cx="5272026" cy="461665"/>
+          </a:xfrm>
+          <a:prstGeom prst="rect">
+            <a:avLst/>
+          </a:prstGeom>
+          <a:noFill/>
+        </p:spPr>
+        <p:txBody>
+          <a:bodyPr wrap="square" rtlCol="0">
+            <a:spAutoFit/>
+          </a:bodyPr>
+          <a:lstStyle/>
+          <a:p>
+            <a:r>
+              <a:rPr lang="en-US" sz="2400" b="1"/>
+              <a:t>c) Lớp Agent</a:t>
+            </a:r>
+          </a:p>
+        </p:txBody>
+      </p:sp>
+      <p:sp>
+        <p:nvSpPr>
+          <p:cNvPr id="7" name="TextBox 6">
+            <a:extLst>
+              <a:ext uri="{FF2B5EF4-FFF2-40B4-BE49-F238E27FC236}">
+                <a16:creationId xmlns:a16="http://schemas.microsoft.com/office/drawing/2014/main" id="{03F28572-F00E-DBD9-CB96-B01B975EB7C1}"/>
+              </a:ext>
+            </a:extLst>
+          </p:cNvPr>
+          <p:cNvSpPr txBox="1"/>
+          <p:nvPr/>
+        </p:nvSpPr>
+        <p:spPr>
+          <a:xfrm>
+            <a:off x="1165600" y="2688336"/>
+            <a:ext cx="9713732" cy="3416320"/>
+          </a:xfrm>
+          <a:prstGeom prst="rect">
+            <a:avLst/>
+          </a:prstGeom>
+          <a:noFill/>
+        </p:spPr>
+        <p:txBody>
+          <a:bodyPr wrap="square" rtlCol="0">
+            <a:spAutoFit/>
+          </a:bodyPr>
+          <a:lstStyle/>
+          <a:p>
+            <a:pPr marL="285750" indent="-285750">
+              <a:buFont typeface="Arial" panose="020B0604020202020204" pitchFamily="34" charset="0"/>
+              <a:buChar char="•"/>
+            </a:pPr>
+            <a:r>
+              <a:rPr lang="en-US" sz="2400" b="1"/>
+              <a:t>Các hàm dùng để train:</a:t>
+            </a:r>
+          </a:p>
+          <a:p>
+            <a:pPr marL="800100" lvl="1" indent="-342900">
+              <a:buFont typeface="Wingdings" panose="05000000000000000000" pitchFamily="2" charset="2"/>
+              <a:buChar char="Ø"/>
+            </a:pPr>
+            <a:r>
+              <a:rPr lang="en-US" sz="2400" b="1"/>
+              <a:t>get_state(): dùng để lấy trạng thái hiện tại của agent.</a:t>
+            </a:r>
+          </a:p>
+          <a:p>
+            <a:pPr marL="800100" lvl="1" indent="-342900">
+              <a:buFont typeface="Wingdings" panose="05000000000000000000" pitchFamily="2" charset="2"/>
+              <a:buChar char="Ø"/>
+            </a:pPr>
+            <a:r>
+              <a:rPr lang="en-US" sz="2400" b="1"/>
+              <a:t>remember(): lưu các trải nghiệm vào memory (deque).</a:t>
+            </a:r>
+          </a:p>
+          <a:p>
+            <a:pPr marL="800100" lvl="1" indent="-342900">
+              <a:buFont typeface="Wingdings" panose="05000000000000000000" pitchFamily="2" charset="2"/>
+              <a:buChar char="Ø"/>
+            </a:pPr>
+            <a:r>
+              <a:rPr lang="en-US" sz="2400" b="1"/>
+              <a:t>train_long_memory(), train_short_memory(): huấn luyện dựa trên batch mẫu từ memort hoặc mẫu đơn lẻ.</a:t>
+            </a:r>
+          </a:p>
+          <a:p>
+            <a:pPr marL="800100" lvl="1" indent="-342900">
+              <a:buFont typeface="Wingdings" panose="05000000000000000000" pitchFamily="2" charset="2"/>
+              <a:buChar char="Ø"/>
+            </a:pPr>
+            <a:r>
+              <a:rPr lang="en-US" sz="2400" b="1"/>
+              <a:t>get_action(): chọn action random hoặc action lấy từ dữ liệu đã huấn luyện.</a:t>
+            </a:r>
+          </a:p>
+          <a:p>
+            <a:pPr marL="800100" lvl="1" indent="-342900">
+              <a:buFont typeface="Wingdings" panose="05000000000000000000" pitchFamily="2" charset="2"/>
+              <a:buChar char="Ø"/>
+            </a:pPr>
+            <a:r>
+              <a:rPr lang="en-US" sz="2400" b="1"/>
+              <a:t>train(): thực hiện quá trình train bằng cách lặp lại các action cho agent học tập.</a:t>
+            </a:r>
+          </a:p>
+        </p:txBody>
+      </p:sp>
+    </p:spTree>
+    <p:extLst>
+      <p:ext uri="{BB962C8B-B14F-4D97-AF65-F5344CB8AC3E}">
+        <p14:creationId xmlns:p14="http://schemas.microsoft.com/office/powerpoint/2010/main" val="1555162595"/>
+      </p:ext>
+    </p:extLst>
+  </p:cSld>
+  <p:clrMapOvr>
+    <a:masterClrMapping/>
+  </p:clrMapOvr>
+</p:sld>
+</file>
+
+<file path=ppt/slides/slide13.xml><?xml version="1.0" encoding="utf-8"?>
+<p:sld xmlns:a="http://schemas.openxmlformats.org/drawingml/2006/main" xmlns:r="http://schemas.openxmlformats.org/officeDocument/2006/relationships" xmlns:p="http://schemas.openxmlformats.org/presentationml/2006/main">
+  <p:cSld>
+    <p:spTree>
+      <p:nvGrpSpPr>
+        <p:cNvPr id="1" name="Shape 82"/>
+        <p:cNvGrpSpPr/>
+        <p:nvPr/>
+      </p:nvGrpSpPr>
+      <p:grpSpPr>
+        <a:xfrm>
+          <a:off x="0" y="0"/>
+          <a:ext cx="0" cy="0"/>
+          <a:chOff x="0" y="0"/>
+          <a:chExt cx="0" cy="0"/>
+        </a:xfrm>
+      </p:grpSpPr>
+      <p:sp>
+        <p:nvSpPr>
+          <p:cNvPr id="86" name="Google Shape;86;p14"/>
+          <p:cNvSpPr txBox="1">
+            <a:spLocks noGrp="1"/>
+          </p:cNvSpPr>
+          <p:nvPr>
+            <p:ph type="sldNum" idx="12"/>
+          </p:nvPr>
+        </p:nvSpPr>
+        <p:spPr>
+          <a:xfrm>
+            <a:off x="10879332" y="5857704"/>
+            <a:ext cx="731600" cy="524800"/>
+          </a:xfrm>
+          <a:prstGeom prst="rect">
+            <a:avLst/>
+          </a:prstGeom>
+        </p:spPr>
+        <p:txBody>
+          <a:bodyPr spcFirstLastPara="1" wrap="square" lIns="121900" tIns="121900" rIns="121900" bIns="121900" anchor="ctr" anchorCtr="0">
+            <a:noAutofit/>
+          </a:bodyPr>
+          <a:lstStyle/>
+          <a:p>
+            <a:pPr defTabSz="1219170">
+              <a:buClr>
+                <a:srgbClr val="000000"/>
+              </a:buClr>
+            </a:pPr>
+            <a:fld id="{00000000-1234-1234-1234-123412341234}" type="slidenum">
+              <a:rPr lang="en" kern="0">
+                <a:solidFill>
+                  <a:srgbClr val="000000"/>
+                </a:solidFill>
+              </a:rPr>
+              <a:pPr defTabSz="1219170">
+                <a:buClr>
+                  <a:srgbClr val="000000"/>
+                </a:buClr>
+              </a:pPr>
+              <a:t>13</a:t>
+            </a:fld>
+            <a:endParaRPr kern="0">
+              <a:solidFill>
+                <a:srgbClr val="000000"/>
+              </a:solidFill>
+            </a:endParaRPr>
+          </a:p>
+        </p:txBody>
+      </p:sp>
+      <p:sp>
+        <p:nvSpPr>
+          <p:cNvPr id="2" name="TextBox 1">
+            <a:extLst>
+              <a:ext uri="{FF2B5EF4-FFF2-40B4-BE49-F238E27FC236}">
+                <a16:creationId xmlns:a16="http://schemas.microsoft.com/office/drawing/2014/main" id="{AC4DFB49-3BF0-765A-D5FC-6C83AFA98EE7}"/>
+              </a:ext>
+            </a:extLst>
+          </p:cNvPr>
+          <p:cNvSpPr txBox="1"/>
+          <p:nvPr/>
+        </p:nvSpPr>
+        <p:spPr>
+          <a:xfrm>
+            <a:off x="3758381" y="766916"/>
+            <a:ext cx="4675239" cy="523220"/>
+          </a:xfrm>
+          <a:prstGeom prst="rect">
+            <a:avLst/>
+          </a:prstGeom>
+          <a:noFill/>
+        </p:spPr>
+        <p:txBody>
+          <a:bodyPr wrap="square" rtlCol="0">
+            <a:spAutoFit/>
+          </a:bodyPr>
+          <a:lstStyle/>
+          <a:p>
+            <a:r>
+              <a:rPr lang="en-US" sz="2800" b="1"/>
+              <a:t>CÁC NGUỒN THAM KHẢO</a:t>
+            </a:r>
+          </a:p>
+        </p:txBody>
+      </p:sp>
+      <p:sp>
+        <p:nvSpPr>
+          <p:cNvPr id="3" name="TextBox 2">
+            <a:extLst>
+              <a:ext uri="{FF2B5EF4-FFF2-40B4-BE49-F238E27FC236}">
+                <a16:creationId xmlns:a16="http://schemas.microsoft.com/office/drawing/2014/main" id="{724D1DF4-6BD1-154C-F52B-344F395D29E0}"/>
+              </a:ext>
+            </a:extLst>
+          </p:cNvPr>
+          <p:cNvSpPr txBox="1"/>
+          <p:nvPr/>
+        </p:nvSpPr>
+        <p:spPr>
+          <a:xfrm>
+            <a:off x="1339676" y="1905506"/>
+            <a:ext cx="9512648" cy="3046988"/>
+          </a:xfrm>
+          <a:prstGeom prst="rect">
+            <a:avLst/>
+          </a:prstGeom>
+          <a:noFill/>
+        </p:spPr>
+        <p:txBody>
+          <a:bodyPr wrap="square" rtlCol="0">
+            <a:spAutoFit/>
+          </a:bodyPr>
+          <a:lstStyle/>
+          <a:p>
+            <a:pPr marL="342900" indent="-342900">
+              <a:buAutoNum type="arabicPeriod"/>
+            </a:pPr>
+            <a:r>
+              <a:rPr lang="vi-VN" sz="2400" b="1" i="0">
+                <a:solidFill>
+                  <a:srgbClr val="1B1B1B"/>
+                </a:solidFill>
+                <a:effectLst/>
+                <a:highlight>
+                  <a:srgbClr val="FFFFFF"/>
+                </a:highlight>
+              </a:rPr>
+              <a:t>Giới thiệu về học tăng cường và ứng dụng Deep Q-Learning chơi game CartPole</a:t>
+            </a:r>
+            <a:r>
+              <a:rPr lang="en-US" sz="2400" b="1" i="0">
+                <a:solidFill>
+                  <a:srgbClr val="1B1B1B"/>
+                </a:solidFill>
+                <a:effectLst/>
+                <a:highlight>
+                  <a:srgbClr val="FFFFFF"/>
+                </a:highlight>
+              </a:rPr>
+              <a:t>, Nguyen Viet Anh </a:t>
+            </a:r>
+            <a:r>
+              <a:rPr lang="en-US" sz="2400" b="1" i="0">
+                <a:solidFill>
+                  <a:srgbClr val="1B1B1B"/>
+                </a:solidFill>
+                <a:effectLst/>
+                <a:highlight>
+                  <a:srgbClr val="FFFFFF"/>
+                </a:highlight>
+                <a:hlinkClick r:id="rId3"/>
+              </a:rPr>
+              <a:t>(Xem tại đây)</a:t>
+            </a:r>
+            <a:endParaRPr lang="en-US" sz="2400" b="1" i="0">
+              <a:solidFill>
+                <a:srgbClr val="1B1B1B"/>
+              </a:solidFill>
+              <a:effectLst/>
+              <a:highlight>
+                <a:srgbClr val="FFFFFF"/>
+              </a:highlight>
+            </a:endParaRPr>
+          </a:p>
+          <a:p>
+            <a:pPr marL="342900" indent="-342900">
+              <a:buAutoNum type="arabicPeriod"/>
+            </a:pPr>
+            <a:r>
+              <a:rPr lang="en-US" sz="2400" b="1" i="0">
+                <a:solidFill>
+                  <a:srgbClr val="1B1B1B"/>
+                </a:solidFill>
+                <a:effectLst/>
+                <a:highlight>
+                  <a:srgbClr val="FFFFFF"/>
+                </a:highlight>
+              </a:rPr>
+              <a:t>Tìm hiểu và dạy máy tính chơi game bằng Deep Q-Learning, Mì AI (Video:</a:t>
+            </a:r>
+            <a:r>
+              <a:rPr lang="en-US" sz="2400" b="1" i="0">
+                <a:solidFill>
+                  <a:srgbClr val="1B1B1B"/>
+                </a:solidFill>
+                <a:effectLst/>
+                <a:highlight>
+                  <a:srgbClr val="FFFFFF"/>
+                </a:highlight>
+                <a:hlinkClick r:id="rId4"/>
+              </a:rPr>
+              <a:t>Xem tại đây</a:t>
+            </a:r>
+            <a:r>
+              <a:rPr lang="en-US" sz="2400" b="1" i="0">
+                <a:solidFill>
+                  <a:srgbClr val="1B1B1B"/>
+                </a:solidFill>
+                <a:effectLst/>
+                <a:highlight>
+                  <a:srgbClr val="FFFFFF"/>
+                </a:highlight>
+              </a:rPr>
+              <a:t>, Github: </a:t>
+            </a:r>
+            <a:r>
+              <a:rPr lang="en-US" sz="2400" b="1" i="0">
+                <a:solidFill>
+                  <a:srgbClr val="1B1B1B"/>
+                </a:solidFill>
+                <a:effectLst/>
+                <a:highlight>
+                  <a:srgbClr val="FFFFFF"/>
+                </a:highlight>
+                <a:hlinkClick r:id="rId5"/>
+              </a:rPr>
+              <a:t>Xem tại đây</a:t>
+            </a:r>
+            <a:r>
+              <a:rPr lang="en-US" sz="2400" b="1" i="0">
+                <a:solidFill>
+                  <a:srgbClr val="1B1B1B"/>
+                </a:solidFill>
+                <a:effectLst/>
+                <a:highlight>
+                  <a:srgbClr val="FFFFFF"/>
+                </a:highlight>
+              </a:rPr>
+              <a:t>)</a:t>
+            </a:r>
+            <a:endParaRPr lang="vi-VN" sz="2400" b="1" i="0">
+              <a:solidFill>
+                <a:srgbClr val="1B1B1B"/>
+              </a:solidFill>
+              <a:effectLst/>
+              <a:highlight>
+                <a:srgbClr val="FFFFFF"/>
+              </a:highlight>
+            </a:endParaRPr>
+          </a:p>
+          <a:p>
+            <a:pPr marL="342900" indent="-342900">
+              <a:buAutoNum type="arabicPeriod"/>
+            </a:pPr>
+            <a:r>
+              <a:rPr lang="en-US" sz="2400" b="1">
+                <a:solidFill>
+                  <a:srgbClr val="1B1B1B"/>
+                </a:solidFill>
+                <a:highlight>
+                  <a:srgbClr val="FFFFFF"/>
+                </a:highlight>
+              </a:rPr>
+              <a:t>Python + PyTorch + Pygame Reinforcement Learning – Train an AI to Play Snake, freeCodeCamp.org (Video:</a:t>
+            </a:r>
+            <a:r>
+              <a:rPr lang="en-US" sz="2400" b="1">
+                <a:solidFill>
+                  <a:srgbClr val="1B1B1B"/>
+                </a:solidFill>
+                <a:highlight>
+                  <a:srgbClr val="FFFFFF"/>
+                </a:highlight>
+                <a:hlinkClick r:id="rId6">
+                  <a:extLst>
+                    <a:ext uri="{A12FA001-AC4F-418D-AE19-62706E023703}">
+                      <ahyp:hlinkClr xmlns:ahyp="http://schemas.microsoft.com/office/drawing/2018/hyperlinkcolor" val="tx"/>
+                    </a:ext>
+                  </a:extLst>
+                </a:hlinkClick>
+              </a:rPr>
+              <a:t>Xem tại đây</a:t>
+            </a:r>
+            <a:r>
+              <a:rPr lang="en-US" sz="2400" b="1">
+                <a:solidFill>
+                  <a:srgbClr val="1B1B1B"/>
+                </a:solidFill>
+                <a:highlight>
+                  <a:srgbClr val="FFFFFF"/>
+                </a:highlight>
+              </a:rPr>
+              <a:t>, Github:</a:t>
+            </a:r>
+            <a:r>
+              <a:rPr lang="en-US" sz="2400" b="1">
+                <a:solidFill>
+                  <a:srgbClr val="1B1B1B"/>
+                </a:solidFill>
+                <a:highlight>
+                  <a:srgbClr val="FFFFFF"/>
+                </a:highlight>
+                <a:hlinkClick r:id="rId7">
+                  <a:extLst>
+                    <a:ext uri="{A12FA001-AC4F-418D-AE19-62706E023703}">
+                      <ahyp:hlinkClr xmlns:ahyp="http://schemas.microsoft.com/office/drawing/2018/hyperlinkcolor" val="tx"/>
+                    </a:ext>
+                  </a:extLst>
+                </a:hlinkClick>
+              </a:rPr>
+              <a:t>Xem tại đây</a:t>
+            </a:r>
+            <a:r>
+              <a:rPr lang="en-US" sz="2400" b="1">
+                <a:solidFill>
+                  <a:srgbClr val="1B1B1B"/>
+                </a:solidFill>
+                <a:highlight>
+                  <a:srgbClr val="FFFFFF"/>
+                </a:highlight>
+              </a:rPr>
+              <a:t>)</a:t>
+            </a:r>
+          </a:p>
+          <a:p>
+            <a:endParaRPr lang="en-US" sz="2400" b="1">
+              <a:solidFill>
+                <a:srgbClr val="1B1B1B"/>
+              </a:solidFill>
+              <a:highlight>
+                <a:srgbClr val="FFFFFF"/>
+              </a:highlight>
+            </a:endParaRPr>
+          </a:p>
+        </p:txBody>
+      </p:sp>
+    </p:spTree>
+    <p:extLst>
+      <p:ext uri="{BB962C8B-B14F-4D97-AF65-F5344CB8AC3E}">
+        <p14:creationId xmlns:p14="http://schemas.microsoft.com/office/powerpoint/2010/main" val="1865630899"/>
       </p:ext>
     </p:extLst>
   </p:cSld>

--- a/BAO_CAO_PBL.pptx
+++ b/BAO_CAO_PBL.pptx
@@ -5,22 +5,23 @@
     <p:sldMasterId id="2147483660" r:id="rId4"/>
   </p:sldMasterIdLst>
   <p:notesMasterIdLst>
-    <p:notesMasterId r:id="rId18"/>
+    <p:notesMasterId r:id="rId19"/>
   </p:notesMasterIdLst>
   <p:sldIdLst>
     <p:sldId id="257" r:id="rId5"/>
-    <p:sldId id="258" r:id="rId6"/>
-    <p:sldId id="259" r:id="rId7"/>
-    <p:sldId id="295" r:id="rId8"/>
-    <p:sldId id="297" r:id="rId9"/>
-    <p:sldId id="304" r:id="rId10"/>
-    <p:sldId id="311" r:id="rId11"/>
-    <p:sldId id="306" r:id="rId12"/>
-    <p:sldId id="307" r:id="rId13"/>
-    <p:sldId id="308" r:id="rId14"/>
-    <p:sldId id="309" r:id="rId15"/>
-    <p:sldId id="312" r:id="rId16"/>
-    <p:sldId id="313" r:id="rId17"/>
+    <p:sldId id="314" r:id="rId6"/>
+    <p:sldId id="258" r:id="rId7"/>
+    <p:sldId id="259" r:id="rId8"/>
+    <p:sldId id="295" r:id="rId9"/>
+    <p:sldId id="297" r:id="rId10"/>
+    <p:sldId id="304" r:id="rId11"/>
+    <p:sldId id="311" r:id="rId12"/>
+    <p:sldId id="306" r:id="rId13"/>
+    <p:sldId id="307" r:id="rId14"/>
+    <p:sldId id="308" r:id="rId15"/>
+    <p:sldId id="309" r:id="rId16"/>
+    <p:sldId id="312" r:id="rId17"/>
+    <p:sldId id="313" r:id="rId18"/>
   </p:sldIdLst>
   <p:sldSz cx="12192000" cy="6858000"/>
   <p:notesSz cx="6858000" cy="9144000"/>
@@ -679,7 +680,7 @@
     </p:spTree>
     <p:extLst>
       <p:ext uri="{BB962C8B-B14F-4D97-AF65-F5344CB8AC3E}">
-        <p14:creationId xmlns:p14="http://schemas.microsoft.com/office/powerpoint/2010/main" val="3689266685"/>
+        <p14:creationId xmlns:p14="http://schemas.microsoft.com/office/powerpoint/2010/main" val="1306608274"/>
       </p:ext>
     </p:extLst>
   </p:cSld>
@@ -788,7 +789,7 @@
     </p:spTree>
     <p:extLst>
       <p:ext uri="{BB962C8B-B14F-4D97-AF65-F5344CB8AC3E}">
-        <p14:creationId xmlns:p14="http://schemas.microsoft.com/office/powerpoint/2010/main" val="3710467807"/>
+        <p14:creationId xmlns:p14="http://schemas.microsoft.com/office/powerpoint/2010/main" val="3689266685"/>
       </p:ext>
     </p:extLst>
   </p:cSld>
@@ -897,6 +898,115 @@
     </p:spTree>
     <p:extLst>
       <p:ext uri="{BB962C8B-B14F-4D97-AF65-F5344CB8AC3E}">
+        <p14:creationId xmlns:p14="http://schemas.microsoft.com/office/powerpoint/2010/main" val="3710467807"/>
+      </p:ext>
+    </p:extLst>
+  </p:cSld>
+  <p:clrMapOvr>
+    <a:masterClrMapping/>
+  </p:clrMapOvr>
+</p:notes>
+</file>
+
+<file path=ppt/notesSlides/notesSlide13.xml><?xml version="1.0" encoding="utf-8"?>
+<p:notes xmlns:a="http://schemas.openxmlformats.org/drawingml/2006/main" xmlns:r="http://schemas.openxmlformats.org/officeDocument/2006/relationships" xmlns:p="http://schemas.openxmlformats.org/presentationml/2006/main" showMasterSp="0" showMasterPhAnim="0">
+  <p:cSld>
+    <p:spTree>
+      <p:nvGrpSpPr>
+        <p:cNvPr id="1" name="Shape 79"/>
+        <p:cNvGrpSpPr/>
+        <p:nvPr/>
+      </p:nvGrpSpPr>
+      <p:grpSpPr>
+        <a:xfrm>
+          <a:off x="0" y="0"/>
+          <a:ext cx="0" cy="0"/>
+          <a:chOff x="0" y="0"/>
+          <a:chExt cx="0" cy="0"/>
+        </a:xfrm>
+      </p:grpSpPr>
+      <p:sp>
+        <p:nvSpPr>
+          <p:cNvPr id="80" name="Google Shape;80;g35f391192_04:notes"/>
+          <p:cNvSpPr>
+            <a:spLocks noGrp="1" noRot="1" noChangeAspect="1"/>
+          </p:cNvSpPr>
+          <p:nvPr>
+            <p:ph type="sldImg" idx="2"/>
+          </p:nvPr>
+        </p:nvSpPr>
+        <p:spPr>
+          <a:xfrm>
+            <a:off x="381000" y="685800"/>
+            <a:ext cx="6096000" cy="3429000"/>
+          </a:xfrm>
+          <a:custGeom>
+            <a:avLst/>
+            <a:gdLst/>
+            <a:ahLst/>
+            <a:cxnLst/>
+            <a:rect l="l" t="t" r="r" b="b"/>
+            <a:pathLst>
+              <a:path w="120000" h="120000" extrusionOk="0">
+                <a:moveTo>
+                  <a:pt x="0" y="0"/>
+                </a:moveTo>
+                <a:lnTo>
+                  <a:pt x="120000" y="0"/>
+                </a:lnTo>
+                <a:lnTo>
+                  <a:pt x="120000" y="120000"/>
+                </a:lnTo>
+                <a:lnTo>
+                  <a:pt x="0" y="120000"/>
+                </a:lnTo>
+                <a:close/>
+              </a:path>
+            </a:pathLst>
+          </a:custGeom>
+        </p:spPr>
+      </p:sp>
+      <p:sp>
+        <p:nvSpPr>
+          <p:cNvPr id="81" name="Google Shape;81;g35f391192_04:notes"/>
+          <p:cNvSpPr txBox="1">
+            <a:spLocks noGrp="1"/>
+          </p:cNvSpPr>
+          <p:nvPr>
+            <p:ph type="body" idx="1"/>
+          </p:nvPr>
+        </p:nvSpPr>
+        <p:spPr>
+          <a:xfrm>
+            <a:off x="685800" y="4343400"/>
+            <a:ext cx="5486400" cy="4114800"/>
+          </a:xfrm>
+          <a:prstGeom prst="rect">
+            <a:avLst/>
+          </a:prstGeom>
+        </p:spPr>
+        <p:txBody>
+          <a:bodyPr spcFirstLastPara="1" wrap="square" lIns="91425" tIns="91425" rIns="91425" bIns="91425" anchor="t" anchorCtr="0">
+            <a:noAutofit/>
+          </a:bodyPr>
+          <a:lstStyle/>
+          <a:p>
+            <a:pPr marL="0" lvl="0" indent="0" algn="l" rtl="0">
+              <a:spcBef>
+                <a:spcPts val="0"/>
+              </a:spcBef>
+              <a:spcAft>
+                <a:spcPts val="0"/>
+              </a:spcAft>
+              <a:buNone/>
+            </a:pPr>
+            <a:endParaRPr/>
+          </a:p>
+        </p:txBody>
+      </p:sp>
+    </p:spTree>
+    <p:extLst>
+      <p:ext uri="{BB962C8B-B14F-4D97-AF65-F5344CB8AC3E}">
         <p14:creationId xmlns:p14="http://schemas.microsoft.com/office/powerpoint/2010/main" val="772879435"/>
       </p:ext>
     </p:extLst>
@@ -907,7 +1017,7 @@
 </p:notes>
 </file>
 
-<file path=ppt/notesSlides/notesSlide13.xml><?xml version="1.0" encoding="utf-8"?>
+<file path=ppt/notesSlides/notesSlide14.xml><?xml version="1.0" encoding="utf-8"?>
 <p:notes xmlns:a="http://schemas.openxmlformats.org/drawingml/2006/main" xmlns:r="http://schemas.openxmlformats.org/officeDocument/2006/relationships" xmlns:p="http://schemas.openxmlformats.org/presentationml/2006/main" showMasterSp="0" showMasterPhAnim="0">
   <p:cSld>
     <p:spTree>
@@ -1113,6 +1223,11 @@
         </p:txBody>
       </p:sp>
     </p:spTree>
+    <p:extLst>
+      <p:ext uri="{BB962C8B-B14F-4D97-AF65-F5344CB8AC3E}">
+        <p14:creationId xmlns:p14="http://schemas.microsoft.com/office/powerpoint/2010/main" val="1779395580"/>
+      </p:ext>
+    </p:extLst>
   </p:cSld>
   <p:clrMapOvr>
     <a:masterClrMapping/>
@@ -1125,7 +1240,7 @@
   <p:cSld>
     <p:spTree>
       <p:nvGrpSpPr>
-        <p:cNvPr id="1" name="Shape 79"/>
+        <p:cNvPr id="1" name="Shape 65"/>
         <p:cNvGrpSpPr/>
         <p:nvPr/>
       </p:nvGrpSpPr>
@@ -1139,7 +1254,7 @@
       </p:grpSpPr>
       <p:sp>
         <p:nvSpPr>
-          <p:cNvPr id="80" name="Google Shape;80;g35f391192_04:notes"/>
+          <p:cNvPr id="66" name="Google Shape;66;g3606f1c2d_30:notes"/>
           <p:cNvSpPr>
             <a:spLocks noGrp="1" noRot="1" noChangeAspect="1"/>
           </p:cNvSpPr>
@@ -1180,7 +1295,7 @@
       </p:sp>
       <p:sp>
         <p:nvSpPr>
-          <p:cNvPr id="81" name="Google Shape;81;g35f391192_04:notes"/>
+          <p:cNvPr id="67" name="Google Shape;67;g3606f1c2d_30:notes"/>
           <p:cNvSpPr txBox="1">
             <a:spLocks noGrp="1"/>
           </p:cNvSpPr>
@@ -1321,11 +1436,6 @@
         </p:txBody>
       </p:sp>
     </p:spTree>
-    <p:extLst>
-      <p:ext uri="{BB962C8B-B14F-4D97-AF65-F5344CB8AC3E}">
-        <p14:creationId xmlns:p14="http://schemas.microsoft.com/office/powerpoint/2010/main" val="305421663"/>
-      </p:ext>
-    </p:extLst>
   </p:cSld>
   <p:clrMapOvr>
     <a:masterClrMapping/>
@@ -1432,7 +1542,7 @@
     </p:spTree>
     <p:extLst>
       <p:ext uri="{BB962C8B-B14F-4D97-AF65-F5344CB8AC3E}">
-        <p14:creationId xmlns:p14="http://schemas.microsoft.com/office/powerpoint/2010/main" val="1130724771"/>
+        <p14:creationId xmlns:p14="http://schemas.microsoft.com/office/powerpoint/2010/main" val="305421663"/>
       </p:ext>
     </p:extLst>
   </p:cSld>
@@ -1541,7 +1651,7 @@
     </p:spTree>
     <p:extLst>
       <p:ext uri="{BB962C8B-B14F-4D97-AF65-F5344CB8AC3E}">
-        <p14:creationId xmlns:p14="http://schemas.microsoft.com/office/powerpoint/2010/main" val="3583426155"/>
+        <p14:creationId xmlns:p14="http://schemas.microsoft.com/office/powerpoint/2010/main" val="1130724771"/>
       </p:ext>
     </p:extLst>
   </p:cSld>
@@ -1552,90 +1662,6 @@
 </file>
 
 <file path=ppt/notesSlides/notesSlide7.xml><?xml version="1.0" encoding="utf-8"?>
-<p:notes xmlns:a="http://schemas.openxmlformats.org/drawingml/2006/main" xmlns:r="http://schemas.openxmlformats.org/officeDocument/2006/relationships" xmlns:p="http://schemas.openxmlformats.org/presentationml/2006/main">
-  <p:cSld>
-    <p:spTree>
-      <p:nvGrpSpPr>
-        <p:cNvPr id="1" name=""/>
-        <p:cNvGrpSpPr/>
-        <p:nvPr/>
-      </p:nvGrpSpPr>
-      <p:grpSpPr>
-        <a:xfrm>
-          <a:off x="0" y="0"/>
-          <a:ext cx="0" cy="0"/>
-          <a:chOff x="0" y="0"/>
-          <a:chExt cx="0" cy="0"/>
-        </a:xfrm>
-      </p:grpSpPr>
-      <p:sp>
-        <p:nvSpPr>
-          <p:cNvPr id="2" name="Slide Image Placeholder 1"/>
-          <p:cNvSpPr>
-            <a:spLocks noGrp="1" noRot="1" noChangeAspect="1"/>
-          </p:cNvSpPr>
-          <p:nvPr>
-            <p:ph type="sldImg"/>
-          </p:nvPr>
-        </p:nvSpPr>
-        <p:spPr/>
-      </p:sp>
-      <p:sp>
-        <p:nvSpPr>
-          <p:cNvPr id="3" name="Notes Placeholder 2"/>
-          <p:cNvSpPr>
-            <a:spLocks noGrp="1"/>
-          </p:cNvSpPr>
-          <p:nvPr>
-            <p:ph type="body" idx="1"/>
-          </p:nvPr>
-        </p:nvSpPr>
-        <p:spPr/>
-        <p:txBody>
-          <a:bodyPr/>
-          <a:lstStyle/>
-          <a:p>
-            <a:endParaRPr lang="en-US"/>
-          </a:p>
-        </p:txBody>
-      </p:sp>
-      <p:sp>
-        <p:nvSpPr>
-          <p:cNvPr id="4" name="Slide Number Placeholder 3"/>
-          <p:cNvSpPr>
-            <a:spLocks noGrp="1"/>
-          </p:cNvSpPr>
-          <p:nvPr>
-            <p:ph type="sldNum" sz="quarter" idx="5"/>
-          </p:nvPr>
-        </p:nvSpPr>
-        <p:spPr/>
-        <p:txBody>
-          <a:bodyPr/>
-          <a:lstStyle/>
-          <a:p>
-            <a:fld id="{797FC0C6-D26F-4982-986A-FF140041D138}" type="slidenum">
-              <a:rPr lang="en-US" smtClean="0"/>
-              <a:t>7</a:t>
-            </a:fld>
-            <a:endParaRPr lang="en-US"/>
-          </a:p>
-        </p:txBody>
-      </p:sp>
-    </p:spTree>
-    <p:extLst>
-      <p:ext uri="{BB962C8B-B14F-4D97-AF65-F5344CB8AC3E}">
-        <p14:creationId xmlns:p14="http://schemas.microsoft.com/office/powerpoint/2010/main" val="2441224424"/>
-      </p:ext>
-    </p:extLst>
-  </p:cSld>
-  <p:clrMapOvr>
-    <a:masterClrMapping/>
-  </p:clrMapOvr>
-</p:notes>
-</file>
-
-<file path=ppt/notesSlides/notesSlide8.xml><?xml version="1.0" encoding="utf-8"?>
 <p:notes xmlns:a="http://schemas.openxmlformats.org/drawingml/2006/main" xmlns:r="http://schemas.openxmlformats.org/officeDocument/2006/relationships" xmlns:p="http://schemas.openxmlformats.org/presentationml/2006/main" showMasterSp="0" showMasterPhAnim="0">
   <p:cSld>
     <p:spTree>
@@ -1734,7 +1760,91 @@
     </p:spTree>
     <p:extLst>
       <p:ext uri="{BB962C8B-B14F-4D97-AF65-F5344CB8AC3E}">
-        <p14:creationId xmlns:p14="http://schemas.microsoft.com/office/powerpoint/2010/main" val="2056661645"/>
+        <p14:creationId xmlns:p14="http://schemas.microsoft.com/office/powerpoint/2010/main" val="3583426155"/>
+      </p:ext>
+    </p:extLst>
+  </p:cSld>
+  <p:clrMapOvr>
+    <a:masterClrMapping/>
+  </p:clrMapOvr>
+</p:notes>
+</file>
+
+<file path=ppt/notesSlides/notesSlide8.xml><?xml version="1.0" encoding="utf-8"?>
+<p:notes xmlns:a="http://schemas.openxmlformats.org/drawingml/2006/main" xmlns:r="http://schemas.openxmlformats.org/officeDocument/2006/relationships" xmlns:p="http://schemas.openxmlformats.org/presentationml/2006/main">
+  <p:cSld>
+    <p:spTree>
+      <p:nvGrpSpPr>
+        <p:cNvPr id="1" name=""/>
+        <p:cNvGrpSpPr/>
+        <p:nvPr/>
+      </p:nvGrpSpPr>
+      <p:grpSpPr>
+        <a:xfrm>
+          <a:off x="0" y="0"/>
+          <a:ext cx="0" cy="0"/>
+          <a:chOff x="0" y="0"/>
+          <a:chExt cx="0" cy="0"/>
+        </a:xfrm>
+      </p:grpSpPr>
+      <p:sp>
+        <p:nvSpPr>
+          <p:cNvPr id="2" name="Slide Image Placeholder 1"/>
+          <p:cNvSpPr>
+            <a:spLocks noGrp="1" noRot="1" noChangeAspect="1"/>
+          </p:cNvSpPr>
+          <p:nvPr>
+            <p:ph type="sldImg"/>
+          </p:nvPr>
+        </p:nvSpPr>
+        <p:spPr/>
+      </p:sp>
+      <p:sp>
+        <p:nvSpPr>
+          <p:cNvPr id="3" name="Notes Placeholder 2"/>
+          <p:cNvSpPr>
+            <a:spLocks noGrp="1"/>
+          </p:cNvSpPr>
+          <p:nvPr>
+            <p:ph type="body" idx="1"/>
+          </p:nvPr>
+        </p:nvSpPr>
+        <p:spPr/>
+        <p:txBody>
+          <a:bodyPr/>
+          <a:lstStyle/>
+          <a:p>
+            <a:endParaRPr lang="en-US"/>
+          </a:p>
+        </p:txBody>
+      </p:sp>
+      <p:sp>
+        <p:nvSpPr>
+          <p:cNvPr id="4" name="Slide Number Placeholder 3"/>
+          <p:cNvSpPr>
+            <a:spLocks noGrp="1"/>
+          </p:cNvSpPr>
+          <p:nvPr>
+            <p:ph type="sldNum" sz="quarter" idx="5"/>
+          </p:nvPr>
+        </p:nvSpPr>
+        <p:spPr/>
+        <p:txBody>
+          <a:bodyPr/>
+          <a:lstStyle/>
+          <a:p>
+            <a:fld id="{797FC0C6-D26F-4982-986A-FF140041D138}" type="slidenum">
+              <a:rPr lang="en-US" smtClean="0"/>
+              <a:t>8</a:t>
+            </a:fld>
+            <a:endParaRPr lang="en-US"/>
+          </a:p>
+        </p:txBody>
+      </p:sp>
+    </p:spTree>
+    <p:extLst>
+      <p:ext uri="{BB962C8B-B14F-4D97-AF65-F5344CB8AC3E}">
+        <p14:creationId xmlns:p14="http://schemas.microsoft.com/office/powerpoint/2010/main" val="2441224424"/>
       </p:ext>
     </p:extLst>
   </p:cSld>
@@ -1843,7 +1953,7 @@
     </p:spTree>
     <p:extLst>
       <p:ext uri="{BB962C8B-B14F-4D97-AF65-F5344CB8AC3E}">
-        <p14:creationId xmlns:p14="http://schemas.microsoft.com/office/powerpoint/2010/main" val="1306608274"/>
+        <p14:creationId xmlns:p14="http://schemas.microsoft.com/office/powerpoint/2010/main" val="2056661645"/>
       </p:ext>
     </p:extLst>
   </p:cSld>
@@ -7953,7 +8063,7 @@
           <a:p>
             <a:r>
               <a:rPr lang="en-US" sz="2400" b="1"/>
-              <a:t>c) Lớp Agent</a:t>
+              <a:t>b) Lớp QTrainer</a:t>
             </a:r>
           </a:p>
         </p:txBody>
@@ -7972,8 +8082,8 @@
         </p:nvSpPr>
         <p:spPr>
           <a:xfrm>
-            <a:off x="1165600" y="2688336"/>
-            <a:ext cx="4901184" cy="2954655"/>
+            <a:off x="1271016" y="2724912"/>
+            <a:ext cx="4901184" cy="3416320"/>
           </a:xfrm>
           <a:prstGeom prst="rect">
             <a:avLst/>
@@ -7992,7 +8102,7 @@
             </a:pPr>
             <a:r>
               <a:rPr lang="en-US" b="1"/>
-              <a:t>Khởi tạo: memory – bộ nhớ replay lưu trữ bản ghi kinh nghiệm của agent, là hàng đợi với maxlen=MAX_MEMORY.</a:t>
+              <a:t>Kiểm tra state là mẫu đơn(simple sample) và thực hiện chuyển đổi thành batch mẫu nếu cần.</a:t>
             </a:r>
           </a:p>
           <a:p>
@@ -8002,7 +8112,7 @@
             </a:pPr>
             <a:r>
               <a:rPr lang="en-US" b="1"/>
-              <a:t>Model từ lớp Linear_QNet với 11 nút đầu vào, 256 ẩn và 3 nút đầu ra.</a:t>
+              <a:t>Sử dụng model để dự đoán Q cho trạng thái hiện tại(pred).</a:t>
             </a:r>
           </a:p>
           <a:p>
@@ -8012,7 +8122,7 @@
             </a:pPr>
             <a:r>
               <a:rPr lang="en-US" b="1"/>
-              <a:t>Trainer từ lớp Qtrainer với model vừa khởi tạo, lr = LR = 0.001, gamma = 0.9.</a:t>
+              <a:t>Tính toán Q cho trạng thái tiếp theo dựa trên phương trình Bellman.</a:t>
             </a:r>
           </a:p>
           <a:p>
@@ -8020,22 +8130,39 @@
               <a:buFont typeface="Arial" panose="020B0604020202020204" pitchFamily="34" charset="0"/>
               <a:buChar char="•"/>
             </a:pPr>
-            <a:endParaRPr lang="en-US" sz="2000" b="1" i="1" u="sng"/>
-          </a:p>
-          <a:p>
             <a:r>
-              <a:rPr lang="en-US" sz="2000" b="1" i="1" u="sng"/>
-              <a:t>Khởi tạo các thông số cơ bản chuẩn bị cho việc huấn luyện.</a:t>
+              <a:rPr lang="en-US" b="1"/>
+              <a:t>Cập nhật giá trị Q mục tiêu cho hành động đã thực hiện.</a:t>
+            </a:r>
+          </a:p>
+          <a:p>
+            <a:pPr marL="285750" indent="-285750">
+              <a:buFont typeface="Arial" panose="020B0604020202020204" pitchFamily="34" charset="0"/>
+              <a:buChar char="•"/>
+            </a:pPr>
+            <a:r>
+              <a:rPr lang="en-US" b="1"/>
+              <a:t>Tính toán mất mát bằng hàm MSE, tính toán gradient của mất mát.</a:t>
+            </a:r>
+          </a:p>
+          <a:p>
+            <a:pPr marL="285750" indent="-285750">
+              <a:buFont typeface="Arial" panose="020B0604020202020204" pitchFamily="34" charset="0"/>
+              <a:buChar char="•"/>
+            </a:pPr>
+            <a:r>
+              <a:rPr lang="en-US" b="1"/>
+              <a:t>Cập nhật trọng số cho mạng.</a:t>
             </a:r>
           </a:p>
         </p:txBody>
       </p:sp>
       <p:pic>
         <p:nvPicPr>
-          <p:cNvPr id="4" name="Picture 3">
+          <p:cNvPr id="3" name="Picture 2">
             <a:extLst>
               <a:ext uri="{FF2B5EF4-FFF2-40B4-BE49-F238E27FC236}">
-                <a16:creationId xmlns:a16="http://schemas.microsoft.com/office/drawing/2014/main" id="{8B182B72-F90D-CD68-7D5C-C7EE256307B6}"/>
+                <a16:creationId xmlns:a16="http://schemas.microsoft.com/office/drawing/2014/main" id="{B4895FBD-5698-EA6E-A065-52674484F74D}"/>
               </a:ext>
             </a:extLst>
           </p:cNvPr>
@@ -8052,8 +8179,8 @@
         </p:blipFill>
         <p:spPr>
           <a:xfrm>
-            <a:off x="6096000" y="2093976"/>
-            <a:ext cx="5514932" cy="3867912"/>
+            <a:off x="6172200" y="1643260"/>
+            <a:ext cx="5098572" cy="4497972"/>
           </a:xfrm>
           <a:prstGeom prst="rect">
             <a:avLst/>
@@ -8063,7 +8190,7 @@
     </p:spTree>
     <p:extLst>
       <p:ext uri="{BB962C8B-B14F-4D97-AF65-F5344CB8AC3E}">
-        <p14:creationId xmlns:p14="http://schemas.microsoft.com/office/powerpoint/2010/main" val="303499731"/>
+        <p14:creationId xmlns:p14="http://schemas.microsoft.com/office/powerpoint/2010/main" val="141269347"/>
       </p:ext>
     </p:extLst>
   </p:cSld>
@@ -8224,7 +8351,7 @@
         <p:spPr>
           <a:xfrm>
             <a:off x="1165600" y="2688336"/>
-            <a:ext cx="4901184" cy="3262432"/>
+            <a:ext cx="4901184" cy="2954655"/>
           </a:xfrm>
           <a:prstGeom prst="rect">
             <a:avLst/>
@@ -8276,7 +8403,7 @@
           <a:p>
             <a:r>
               <a:rPr lang="en-US" sz="2000" b="1" i="1" u="sng"/>
-              <a:t>Khởi tạo các thông số cơ bản chuẩn bị cho việc huấn luyện. Các quá trình huấn luyện ở code.</a:t>
+              <a:t>Khởi tạo các thông số cơ bản chuẩn bị cho việc huấn luyện.</a:t>
             </a:r>
           </a:p>
         </p:txBody>
@@ -8314,7 +8441,7 @@
     </p:spTree>
     <p:extLst>
       <p:ext uri="{BB962C8B-B14F-4D97-AF65-F5344CB8AC3E}">
-        <p14:creationId xmlns:p14="http://schemas.microsoft.com/office/powerpoint/2010/main" val="1330651559"/>
+        <p14:creationId xmlns:p14="http://schemas.microsoft.com/office/powerpoint/2010/main" val="303499731"/>
       </p:ext>
     </p:extLst>
   </p:cSld>
@@ -8475,6 +8602,257 @@
         <p:spPr>
           <a:xfrm>
             <a:off x="1165600" y="2688336"/>
+            <a:ext cx="4901184" cy="3262432"/>
+          </a:xfrm>
+          <a:prstGeom prst="rect">
+            <a:avLst/>
+          </a:prstGeom>
+          <a:noFill/>
+        </p:spPr>
+        <p:txBody>
+          <a:bodyPr wrap="square" rtlCol="0">
+            <a:spAutoFit/>
+          </a:bodyPr>
+          <a:lstStyle/>
+          <a:p>
+            <a:pPr marL="285750" indent="-285750">
+              <a:buFont typeface="Arial" panose="020B0604020202020204" pitchFamily="34" charset="0"/>
+              <a:buChar char="•"/>
+            </a:pPr>
+            <a:r>
+              <a:rPr lang="en-US" b="1"/>
+              <a:t>Khởi tạo: memory – bộ nhớ replay lưu trữ bản ghi kinh nghiệm của agent, là hàng đợi với maxlen=MAX_MEMORY.</a:t>
+            </a:r>
+          </a:p>
+          <a:p>
+            <a:pPr marL="285750" indent="-285750">
+              <a:buFont typeface="Arial" panose="020B0604020202020204" pitchFamily="34" charset="0"/>
+              <a:buChar char="•"/>
+            </a:pPr>
+            <a:r>
+              <a:rPr lang="en-US" b="1"/>
+              <a:t>Model từ lớp Linear_QNet với 11 nút đầu vào, 256 ẩn và 3 nút đầu ra.</a:t>
+            </a:r>
+          </a:p>
+          <a:p>
+            <a:pPr marL="285750" indent="-285750">
+              <a:buFont typeface="Arial" panose="020B0604020202020204" pitchFamily="34" charset="0"/>
+              <a:buChar char="•"/>
+            </a:pPr>
+            <a:r>
+              <a:rPr lang="en-US" b="1"/>
+              <a:t>Trainer từ lớp Qtrainer với model vừa khởi tạo, lr = LR = 0.001, gamma = 0.9.</a:t>
+            </a:r>
+          </a:p>
+          <a:p>
+            <a:pPr marL="285750" indent="-285750">
+              <a:buFont typeface="Arial" panose="020B0604020202020204" pitchFamily="34" charset="0"/>
+              <a:buChar char="•"/>
+            </a:pPr>
+            <a:endParaRPr lang="en-US" sz="2000" b="1" i="1" u="sng"/>
+          </a:p>
+          <a:p>
+            <a:r>
+              <a:rPr lang="en-US" sz="2000" b="1" i="1" u="sng"/>
+              <a:t>Khởi tạo các thông số cơ bản chuẩn bị cho việc huấn luyện. Các quá trình huấn luyện ở code.</a:t>
+            </a:r>
+          </a:p>
+        </p:txBody>
+      </p:sp>
+      <p:pic>
+        <p:nvPicPr>
+          <p:cNvPr id="4" name="Picture 3">
+            <a:extLst>
+              <a:ext uri="{FF2B5EF4-FFF2-40B4-BE49-F238E27FC236}">
+                <a16:creationId xmlns:a16="http://schemas.microsoft.com/office/drawing/2014/main" id="{8B182B72-F90D-CD68-7D5C-C7EE256307B6}"/>
+              </a:ext>
+            </a:extLst>
+          </p:cNvPr>
+          <p:cNvPicPr>
+            <a:picLocks noChangeAspect="1"/>
+          </p:cNvPicPr>
+          <p:nvPr/>
+        </p:nvPicPr>
+        <p:blipFill>
+          <a:blip r:embed="rId3"/>
+          <a:stretch>
+            <a:fillRect/>
+          </a:stretch>
+        </p:blipFill>
+        <p:spPr>
+          <a:xfrm>
+            <a:off x="6096000" y="2093976"/>
+            <a:ext cx="5514932" cy="3867912"/>
+          </a:xfrm>
+          <a:prstGeom prst="rect">
+            <a:avLst/>
+          </a:prstGeom>
+        </p:spPr>
+      </p:pic>
+    </p:spTree>
+    <p:extLst>
+      <p:ext uri="{BB962C8B-B14F-4D97-AF65-F5344CB8AC3E}">
+        <p14:creationId xmlns:p14="http://schemas.microsoft.com/office/powerpoint/2010/main" val="1330651559"/>
+      </p:ext>
+    </p:extLst>
+  </p:cSld>
+  <p:clrMapOvr>
+    <a:masterClrMapping/>
+  </p:clrMapOvr>
+</p:sld>
+</file>
+
+<file path=ppt/slides/slide13.xml><?xml version="1.0" encoding="utf-8"?>
+<p:sld xmlns:a="http://schemas.openxmlformats.org/drawingml/2006/main" xmlns:r="http://schemas.openxmlformats.org/officeDocument/2006/relationships" xmlns:p="http://schemas.openxmlformats.org/presentationml/2006/main">
+  <p:cSld>
+    <p:spTree>
+      <p:nvGrpSpPr>
+        <p:cNvPr id="1" name="Shape 82"/>
+        <p:cNvGrpSpPr/>
+        <p:nvPr/>
+      </p:nvGrpSpPr>
+      <p:grpSpPr>
+        <a:xfrm>
+          <a:off x="0" y="0"/>
+          <a:ext cx="0" cy="0"/>
+          <a:chOff x="0" y="0"/>
+          <a:chExt cx="0" cy="0"/>
+        </a:xfrm>
+      </p:grpSpPr>
+      <p:sp>
+        <p:nvSpPr>
+          <p:cNvPr id="83" name="Google Shape;83;p14"/>
+          <p:cNvSpPr txBox="1">
+            <a:spLocks noGrp="1"/>
+          </p:cNvSpPr>
+          <p:nvPr>
+            <p:ph type="ctrTitle" idx="4294967295"/>
+          </p:nvPr>
+        </p:nvSpPr>
+        <p:spPr>
+          <a:xfrm>
+            <a:off x="829056" y="731520"/>
+            <a:ext cx="10533887" cy="1362456"/>
+          </a:xfrm>
+          <a:prstGeom prst="rect">
+            <a:avLst/>
+          </a:prstGeom>
+        </p:spPr>
+        <p:txBody>
+          <a:bodyPr spcFirstLastPara="1" wrap="square" lIns="121900" tIns="121900" rIns="121900" bIns="121900" anchor="b" anchorCtr="0">
+            <a:noAutofit/>
+          </a:bodyPr>
+          <a:lstStyle/>
+          <a:p>
+            <a:r>
+              <a:rPr lang="en-US"/>
+              <a:t>2. Xây dựng DQN đơn giản để huấn luyện dựa trên môi trường.</a:t>
+            </a:r>
+            <a:endParaRPr/>
+          </a:p>
+        </p:txBody>
+      </p:sp>
+      <p:sp>
+        <p:nvSpPr>
+          <p:cNvPr id="86" name="Google Shape;86;p14"/>
+          <p:cNvSpPr txBox="1">
+            <a:spLocks noGrp="1"/>
+          </p:cNvSpPr>
+          <p:nvPr>
+            <p:ph type="sldNum" idx="12"/>
+          </p:nvPr>
+        </p:nvSpPr>
+        <p:spPr>
+          <a:xfrm>
+            <a:off x="10879332" y="5857704"/>
+            <a:ext cx="731600" cy="524800"/>
+          </a:xfrm>
+          <a:prstGeom prst="rect">
+            <a:avLst/>
+          </a:prstGeom>
+        </p:spPr>
+        <p:txBody>
+          <a:bodyPr spcFirstLastPara="1" wrap="square" lIns="121900" tIns="121900" rIns="121900" bIns="121900" anchor="ctr" anchorCtr="0">
+            <a:noAutofit/>
+          </a:bodyPr>
+          <a:lstStyle/>
+          <a:p>
+            <a:pPr defTabSz="1219170">
+              <a:buClr>
+                <a:srgbClr val="000000"/>
+              </a:buClr>
+            </a:pPr>
+            <a:fld id="{00000000-1234-1234-1234-123412341234}" type="slidenum">
+              <a:rPr lang="en" kern="0">
+                <a:solidFill>
+                  <a:srgbClr val="000000"/>
+                </a:solidFill>
+              </a:rPr>
+              <a:pPr defTabSz="1219170">
+                <a:buClr>
+                  <a:srgbClr val="000000"/>
+                </a:buClr>
+              </a:pPr>
+              <a:t>13</a:t>
+            </a:fld>
+            <a:endParaRPr kern="0">
+              <a:solidFill>
+                <a:srgbClr val="000000"/>
+              </a:solidFill>
+            </a:endParaRPr>
+          </a:p>
+        </p:txBody>
+      </p:sp>
+      <p:sp>
+        <p:nvSpPr>
+          <p:cNvPr id="6" name="TextBox 5">
+            <a:extLst>
+              <a:ext uri="{FF2B5EF4-FFF2-40B4-BE49-F238E27FC236}">
+                <a16:creationId xmlns:a16="http://schemas.microsoft.com/office/drawing/2014/main" id="{52929F12-8803-7E23-72DD-E3D8CE88CFBE}"/>
+              </a:ext>
+            </a:extLst>
+          </p:cNvPr>
+          <p:cNvSpPr txBox="1"/>
+          <p:nvPr/>
+        </p:nvSpPr>
+        <p:spPr>
+          <a:xfrm>
+            <a:off x="980179" y="2093976"/>
+            <a:ext cx="5272026" cy="461665"/>
+          </a:xfrm>
+          <a:prstGeom prst="rect">
+            <a:avLst/>
+          </a:prstGeom>
+          <a:noFill/>
+        </p:spPr>
+        <p:txBody>
+          <a:bodyPr wrap="square" rtlCol="0">
+            <a:spAutoFit/>
+          </a:bodyPr>
+          <a:lstStyle/>
+          <a:p>
+            <a:r>
+              <a:rPr lang="en-US" sz="2400" b="1"/>
+              <a:t>c) Lớp Agent</a:t>
+            </a:r>
+          </a:p>
+        </p:txBody>
+      </p:sp>
+      <p:sp>
+        <p:nvSpPr>
+          <p:cNvPr id="7" name="TextBox 6">
+            <a:extLst>
+              <a:ext uri="{FF2B5EF4-FFF2-40B4-BE49-F238E27FC236}">
+                <a16:creationId xmlns:a16="http://schemas.microsoft.com/office/drawing/2014/main" id="{03F28572-F00E-DBD9-CB96-B01B975EB7C1}"/>
+              </a:ext>
+            </a:extLst>
+          </p:cNvPr>
+          <p:cNvSpPr txBox="1"/>
+          <p:nvPr/>
+        </p:nvSpPr>
+        <p:spPr>
+          <a:xfrm>
+            <a:off x="1165600" y="2688336"/>
             <a:ext cx="9713732" cy="3416320"/>
           </a:xfrm>
           <a:prstGeom prst="rect">
@@ -8562,7 +8940,7 @@
 </p:sld>
 </file>
 
-<file path=ppt/slides/slide13.xml><?xml version="1.0" encoding="utf-8"?>
+<file path=ppt/slides/slide14.xml><?xml version="1.0" encoding="utf-8"?>
 <p:sld xmlns:a="http://schemas.openxmlformats.org/drawingml/2006/main" xmlns:r="http://schemas.openxmlformats.org/officeDocument/2006/relationships" xmlns:p="http://schemas.openxmlformats.org/presentationml/2006/main">
   <p:cSld>
     <p:spTree>
@@ -8620,7 +8998,7 @@
                   <a:srgbClr val="000000"/>
                 </a:buClr>
               </a:pPr>
-              <a:t>13</a:t>
+              <a:t>14</a:t>
             </a:fld>
             <a:endParaRPr kern="0">
               <a:solidFill>
@@ -8947,8 +9325,8 @@
         </p:nvSpPr>
         <p:spPr>
           <a:xfrm>
-            <a:off x="1158865" y="1319367"/>
-            <a:ext cx="3420568" cy="960867"/>
+            <a:off x="1158866" y="1020156"/>
+            <a:ext cx="2764206" cy="844724"/>
           </a:xfrm>
           <a:prstGeom prst="rect">
             <a:avLst/>
@@ -8962,7 +9340,7 @@
           <a:p>
             <a:r>
               <a:rPr lang="en"/>
-              <a:t>Nội dung:</a:t>
+              <a:t>Mục tiêu</a:t>
             </a:r>
             <a:endParaRPr/>
           </a:p>
@@ -9954,6 +10332,1411 @@
         </p:nvSpPr>
         <p:spPr>
           <a:xfrm>
+            <a:off x="1158866" y="2113098"/>
+            <a:ext cx="9965480" cy="5093959"/>
+          </a:xfrm>
+          <a:prstGeom prst="rect">
+            <a:avLst/>
+          </a:prstGeom>
+          <a:noFill/>
+          <a:ln>
+            <a:noFill/>
+          </a:ln>
+        </p:spPr>
+        <p:txBody>
+          <a:bodyPr spcFirstLastPara="1" wrap="square" lIns="121900" tIns="121900" rIns="121900" bIns="121900" anchor="b" anchorCtr="0">
+            <a:noAutofit/>
+          </a:bodyPr>
+          <a:lstStyle>
+            <a:defPPr marR="0" lvl="0" algn="l" rtl="0">
+              <a:lnSpc>
+                <a:spcPct val="100000"/>
+              </a:lnSpc>
+              <a:spcBef>
+                <a:spcPts val="0"/>
+              </a:spcBef>
+              <a:spcAft>
+                <a:spcPts val="0"/>
+              </a:spcAft>
+            </a:defPPr>
+            <a:lvl1pPr marR="0" lvl="0" algn="l" rtl="0">
+              <a:lnSpc>
+                <a:spcPct val="100000"/>
+              </a:lnSpc>
+              <a:spcBef>
+                <a:spcPts val="0"/>
+              </a:spcBef>
+              <a:spcAft>
+                <a:spcPts val="0"/>
+              </a:spcAft>
+              <a:buClr>
+                <a:schemeClr val="dk1"/>
+              </a:buClr>
+              <a:buSzPts val="4000"/>
+              <a:buFont typeface="Work Sans"/>
+              <a:buNone/>
+              <a:defRPr sz="4000" b="1" i="0" u="none" strike="noStrike" cap="none">
+                <a:solidFill>
+                  <a:schemeClr val="dk1"/>
+                </a:solidFill>
+                <a:latin typeface="Work Sans"/>
+                <a:ea typeface="Work Sans"/>
+                <a:cs typeface="Work Sans"/>
+                <a:sym typeface="Work Sans"/>
+              </a:defRPr>
+            </a:lvl1pPr>
+            <a:lvl2pPr marR="0" lvl="1" algn="l" rtl="0">
+              <a:lnSpc>
+                <a:spcPct val="100000"/>
+              </a:lnSpc>
+              <a:spcBef>
+                <a:spcPts val="0"/>
+              </a:spcBef>
+              <a:spcAft>
+                <a:spcPts val="0"/>
+              </a:spcAft>
+              <a:buClr>
+                <a:schemeClr val="dk1"/>
+              </a:buClr>
+              <a:buSzPts val="4000"/>
+              <a:buFont typeface="Work Sans"/>
+              <a:buNone/>
+              <a:defRPr sz="4000" b="1" i="0" u="none" strike="noStrike" cap="none">
+                <a:solidFill>
+                  <a:schemeClr val="dk1"/>
+                </a:solidFill>
+                <a:latin typeface="Work Sans"/>
+                <a:ea typeface="Work Sans"/>
+                <a:cs typeface="Work Sans"/>
+                <a:sym typeface="Work Sans"/>
+              </a:defRPr>
+            </a:lvl2pPr>
+            <a:lvl3pPr marR="0" lvl="2" algn="l" rtl="0">
+              <a:lnSpc>
+                <a:spcPct val="100000"/>
+              </a:lnSpc>
+              <a:spcBef>
+                <a:spcPts val="0"/>
+              </a:spcBef>
+              <a:spcAft>
+                <a:spcPts val="0"/>
+              </a:spcAft>
+              <a:buClr>
+                <a:schemeClr val="dk1"/>
+              </a:buClr>
+              <a:buSzPts val="4000"/>
+              <a:buFont typeface="Work Sans"/>
+              <a:buNone/>
+              <a:defRPr sz="4000" b="1" i="0" u="none" strike="noStrike" cap="none">
+                <a:solidFill>
+                  <a:schemeClr val="dk1"/>
+                </a:solidFill>
+                <a:latin typeface="Work Sans"/>
+                <a:ea typeface="Work Sans"/>
+                <a:cs typeface="Work Sans"/>
+                <a:sym typeface="Work Sans"/>
+              </a:defRPr>
+            </a:lvl3pPr>
+            <a:lvl4pPr marR="0" lvl="3" algn="l" rtl="0">
+              <a:lnSpc>
+                <a:spcPct val="100000"/>
+              </a:lnSpc>
+              <a:spcBef>
+                <a:spcPts val="0"/>
+              </a:spcBef>
+              <a:spcAft>
+                <a:spcPts val="0"/>
+              </a:spcAft>
+              <a:buClr>
+                <a:schemeClr val="dk1"/>
+              </a:buClr>
+              <a:buSzPts val="4000"/>
+              <a:buFont typeface="Work Sans"/>
+              <a:buNone/>
+              <a:defRPr sz="4000" b="1" i="0" u="none" strike="noStrike" cap="none">
+                <a:solidFill>
+                  <a:schemeClr val="dk1"/>
+                </a:solidFill>
+                <a:latin typeface="Work Sans"/>
+                <a:ea typeface="Work Sans"/>
+                <a:cs typeface="Work Sans"/>
+                <a:sym typeface="Work Sans"/>
+              </a:defRPr>
+            </a:lvl4pPr>
+            <a:lvl5pPr marR="0" lvl="4" algn="l" rtl="0">
+              <a:lnSpc>
+                <a:spcPct val="100000"/>
+              </a:lnSpc>
+              <a:spcBef>
+                <a:spcPts val="0"/>
+              </a:spcBef>
+              <a:spcAft>
+                <a:spcPts val="0"/>
+              </a:spcAft>
+              <a:buClr>
+                <a:schemeClr val="dk1"/>
+              </a:buClr>
+              <a:buSzPts val="4000"/>
+              <a:buFont typeface="Work Sans"/>
+              <a:buNone/>
+              <a:defRPr sz="4000" b="1" i="0" u="none" strike="noStrike" cap="none">
+                <a:solidFill>
+                  <a:schemeClr val="dk1"/>
+                </a:solidFill>
+                <a:latin typeface="Work Sans"/>
+                <a:ea typeface="Work Sans"/>
+                <a:cs typeface="Work Sans"/>
+                <a:sym typeface="Work Sans"/>
+              </a:defRPr>
+            </a:lvl5pPr>
+            <a:lvl6pPr marR="0" lvl="5" algn="l" rtl="0">
+              <a:lnSpc>
+                <a:spcPct val="100000"/>
+              </a:lnSpc>
+              <a:spcBef>
+                <a:spcPts val="0"/>
+              </a:spcBef>
+              <a:spcAft>
+                <a:spcPts val="0"/>
+              </a:spcAft>
+              <a:buClr>
+                <a:schemeClr val="dk1"/>
+              </a:buClr>
+              <a:buSzPts val="4000"/>
+              <a:buFont typeface="Work Sans"/>
+              <a:buNone/>
+              <a:defRPr sz="4000" b="1" i="0" u="none" strike="noStrike" cap="none">
+                <a:solidFill>
+                  <a:schemeClr val="dk1"/>
+                </a:solidFill>
+                <a:latin typeface="Work Sans"/>
+                <a:ea typeface="Work Sans"/>
+                <a:cs typeface="Work Sans"/>
+                <a:sym typeface="Work Sans"/>
+              </a:defRPr>
+            </a:lvl6pPr>
+            <a:lvl7pPr marR="0" lvl="6" algn="l" rtl="0">
+              <a:lnSpc>
+                <a:spcPct val="100000"/>
+              </a:lnSpc>
+              <a:spcBef>
+                <a:spcPts val="0"/>
+              </a:spcBef>
+              <a:spcAft>
+                <a:spcPts val="0"/>
+              </a:spcAft>
+              <a:buClr>
+                <a:schemeClr val="dk1"/>
+              </a:buClr>
+              <a:buSzPts val="4000"/>
+              <a:buFont typeface="Work Sans"/>
+              <a:buNone/>
+              <a:defRPr sz="4000" b="1" i="0" u="none" strike="noStrike" cap="none">
+                <a:solidFill>
+                  <a:schemeClr val="dk1"/>
+                </a:solidFill>
+                <a:latin typeface="Work Sans"/>
+                <a:ea typeface="Work Sans"/>
+                <a:cs typeface="Work Sans"/>
+                <a:sym typeface="Work Sans"/>
+              </a:defRPr>
+            </a:lvl7pPr>
+            <a:lvl8pPr marR="0" lvl="7" algn="l" rtl="0">
+              <a:lnSpc>
+                <a:spcPct val="100000"/>
+              </a:lnSpc>
+              <a:spcBef>
+                <a:spcPts val="0"/>
+              </a:spcBef>
+              <a:spcAft>
+                <a:spcPts val="0"/>
+              </a:spcAft>
+              <a:buClr>
+                <a:schemeClr val="dk1"/>
+              </a:buClr>
+              <a:buSzPts val="4000"/>
+              <a:buFont typeface="Work Sans"/>
+              <a:buNone/>
+              <a:defRPr sz="4000" b="1" i="0" u="none" strike="noStrike" cap="none">
+                <a:solidFill>
+                  <a:schemeClr val="dk1"/>
+                </a:solidFill>
+                <a:latin typeface="Work Sans"/>
+                <a:ea typeface="Work Sans"/>
+                <a:cs typeface="Work Sans"/>
+                <a:sym typeface="Work Sans"/>
+              </a:defRPr>
+            </a:lvl8pPr>
+            <a:lvl9pPr marR="0" lvl="8" algn="l" rtl="0">
+              <a:lnSpc>
+                <a:spcPct val="100000"/>
+              </a:lnSpc>
+              <a:spcBef>
+                <a:spcPts val="0"/>
+              </a:spcBef>
+              <a:spcAft>
+                <a:spcPts val="0"/>
+              </a:spcAft>
+              <a:buClr>
+                <a:schemeClr val="dk1"/>
+              </a:buClr>
+              <a:buSzPts val="4000"/>
+              <a:buFont typeface="Work Sans"/>
+              <a:buNone/>
+              <a:defRPr sz="4000" b="1" i="0" u="none" strike="noStrike" cap="none">
+                <a:solidFill>
+                  <a:schemeClr val="dk1"/>
+                </a:solidFill>
+                <a:latin typeface="Work Sans"/>
+                <a:ea typeface="Work Sans"/>
+                <a:cs typeface="Work Sans"/>
+                <a:sym typeface="Work Sans"/>
+              </a:defRPr>
+            </a:lvl9pPr>
+          </a:lstStyle>
+          <a:p>
+            <a:pPr marL="457200" indent="-457200" defTabSz="1219170">
+              <a:buClr>
+                <a:srgbClr val="000000"/>
+              </a:buClr>
+              <a:buFont typeface="Wingdings" panose="05000000000000000000" pitchFamily="2" charset="2"/>
+              <a:buChar char="§"/>
+            </a:pPr>
+            <a:r>
+              <a:rPr lang="en-US" sz="3200" kern="0">
+                <a:solidFill>
+                  <a:srgbClr val="000000"/>
+                </a:solidFill>
+              </a:rPr>
+              <a:t>Tìm hiểu sơ lược về thuật toán học tăng cường Deep Q-Learning.</a:t>
+            </a:r>
+          </a:p>
+          <a:p>
+            <a:pPr marL="457200" indent="-457200" defTabSz="1219170">
+              <a:buClr>
+                <a:srgbClr val="000000"/>
+              </a:buClr>
+              <a:buFont typeface="Wingdings" panose="05000000000000000000" pitchFamily="2" charset="2"/>
+              <a:buChar char="§"/>
+            </a:pPr>
+            <a:r>
+              <a:rPr lang="en-US" sz="3200" kern="0">
+                <a:solidFill>
+                  <a:srgbClr val="000000"/>
+                </a:solidFill>
+              </a:rPr>
+              <a:t>Xây dựng được môi trường cơ bản để sử dụng Deep Q-Learning.</a:t>
+            </a:r>
+          </a:p>
+          <a:p>
+            <a:pPr marL="457200" indent="-457200" defTabSz="1219170">
+              <a:buClr>
+                <a:srgbClr val="000000"/>
+              </a:buClr>
+              <a:buFont typeface="Wingdings" panose="05000000000000000000" pitchFamily="2" charset="2"/>
+              <a:buChar char="§"/>
+            </a:pPr>
+            <a:r>
+              <a:rPr lang="en-US" sz="3200" kern="0">
+                <a:solidFill>
+                  <a:srgbClr val="000000"/>
+                </a:solidFill>
+              </a:rPr>
+              <a:t>Huấn luyện với môi trường đạt kết quả khả quan.</a:t>
+            </a:r>
+          </a:p>
+          <a:p>
+            <a:pPr marL="457200" indent="-457200" defTabSz="1219170">
+              <a:buClr>
+                <a:srgbClr val="000000"/>
+              </a:buClr>
+              <a:buFont typeface="Wingdings" panose="05000000000000000000" pitchFamily="2" charset="2"/>
+              <a:buChar char="§"/>
+            </a:pPr>
+            <a:r>
+              <a:rPr lang="en-US" sz="3200" kern="0">
+                <a:solidFill>
+                  <a:srgbClr val="000000"/>
+                </a:solidFill>
+              </a:rPr>
+              <a:t>Tiền đề để sử dụng Deep Q-Learning cho các dự án khác.</a:t>
+            </a:r>
+          </a:p>
+          <a:p>
+            <a:pPr defTabSz="1219170">
+              <a:buClr>
+                <a:srgbClr val="000000"/>
+              </a:buClr>
+            </a:pPr>
+            <a:endParaRPr lang="en-US" sz="3200" kern="0">
+              <a:solidFill>
+                <a:srgbClr val="000000"/>
+              </a:solidFill>
+            </a:endParaRPr>
+          </a:p>
+          <a:p>
+            <a:pPr defTabSz="1219170">
+              <a:buClr>
+                <a:srgbClr val="000000"/>
+              </a:buClr>
+            </a:pPr>
+            <a:endParaRPr lang="en-US" sz="3200" kern="0">
+              <a:solidFill>
+                <a:srgbClr val="000000"/>
+              </a:solidFill>
+            </a:endParaRPr>
+          </a:p>
+        </p:txBody>
+      </p:sp>
+    </p:spTree>
+    <p:extLst>
+      <p:ext uri="{BB962C8B-B14F-4D97-AF65-F5344CB8AC3E}">
+        <p14:creationId xmlns:p14="http://schemas.microsoft.com/office/powerpoint/2010/main" val="4056972252"/>
+      </p:ext>
+    </p:extLst>
+  </p:cSld>
+  <p:clrMapOvr>
+    <a:masterClrMapping/>
+  </p:clrMapOvr>
+</p:sld>
+</file>
+
+<file path=ppt/slides/slide3.xml><?xml version="1.0" encoding="utf-8"?>
+<p:sld xmlns:a="http://schemas.openxmlformats.org/drawingml/2006/main" xmlns:r="http://schemas.openxmlformats.org/officeDocument/2006/relationships" xmlns:p="http://schemas.openxmlformats.org/presentationml/2006/main">
+  <p:cSld>
+    <p:spTree>
+      <p:nvGrpSpPr>
+        <p:cNvPr id="1" name="Shape 68"/>
+        <p:cNvGrpSpPr/>
+        <p:nvPr/>
+      </p:nvGrpSpPr>
+      <p:grpSpPr>
+        <a:xfrm>
+          <a:off x="0" y="0"/>
+          <a:ext cx="0" cy="0"/>
+          <a:chOff x="0" y="0"/>
+          <a:chExt cx="0" cy="0"/>
+        </a:xfrm>
+      </p:grpSpPr>
+      <p:sp>
+        <p:nvSpPr>
+          <p:cNvPr id="69" name="Google Shape;69;p13"/>
+          <p:cNvSpPr txBox="1">
+            <a:spLocks noGrp="1"/>
+          </p:cNvSpPr>
+          <p:nvPr>
+            <p:ph type="title"/>
+          </p:nvPr>
+        </p:nvSpPr>
+        <p:spPr>
+          <a:xfrm>
+            <a:off x="1158865" y="1319367"/>
+            <a:ext cx="3420568" cy="960867"/>
+          </a:xfrm>
+          <a:prstGeom prst="rect">
+            <a:avLst/>
+          </a:prstGeom>
+        </p:spPr>
+        <p:txBody>
+          <a:bodyPr spcFirstLastPara="1" wrap="square" lIns="121900" tIns="121900" rIns="121900" bIns="121900" anchor="b" anchorCtr="0">
+            <a:noAutofit/>
+          </a:bodyPr>
+          <a:lstStyle/>
+          <a:p>
+            <a:r>
+              <a:rPr lang="en"/>
+              <a:t>Nội dung:</a:t>
+            </a:r>
+            <a:endParaRPr/>
+          </a:p>
+        </p:txBody>
+      </p:sp>
+      <p:grpSp>
+        <p:nvGrpSpPr>
+          <p:cNvPr id="73" name="Google Shape;73;p13"/>
+          <p:cNvGrpSpPr/>
+          <p:nvPr/>
+        </p:nvGrpSpPr>
+        <p:grpSpPr>
+          <a:xfrm>
+            <a:off x="9660993" y="948937"/>
+            <a:ext cx="1463353" cy="1217432"/>
+            <a:chOff x="1926350" y="995225"/>
+            <a:chExt cx="428650" cy="356600"/>
+          </a:xfrm>
+        </p:grpSpPr>
+        <p:sp>
+          <p:nvSpPr>
+            <p:cNvPr id="74" name="Google Shape;74;p13"/>
+            <p:cNvSpPr/>
+            <p:nvPr/>
+          </p:nvSpPr>
+          <p:spPr>
+            <a:xfrm>
+              <a:off x="1926350" y="1298075"/>
+              <a:ext cx="208225" cy="53750"/>
+            </a:xfrm>
+            <a:custGeom>
+              <a:avLst/>
+              <a:gdLst/>
+              <a:ahLst/>
+              <a:cxnLst/>
+              <a:rect l="l" t="t" r="r" b="b"/>
+              <a:pathLst>
+                <a:path w="8329" h="2150" extrusionOk="0">
+                  <a:moveTo>
+                    <a:pt x="0" y="0"/>
+                  </a:moveTo>
+                  <a:lnTo>
+                    <a:pt x="0" y="489"/>
+                  </a:lnTo>
+                  <a:lnTo>
+                    <a:pt x="25" y="635"/>
+                  </a:lnTo>
+                  <a:lnTo>
+                    <a:pt x="74" y="758"/>
+                  </a:lnTo>
+                  <a:lnTo>
+                    <a:pt x="147" y="855"/>
+                  </a:lnTo>
+                  <a:lnTo>
+                    <a:pt x="245" y="953"/>
+                  </a:lnTo>
+                  <a:lnTo>
+                    <a:pt x="391" y="1026"/>
+                  </a:lnTo>
+                  <a:lnTo>
+                    <a:pt x="562" y="1051"/>
+                  </a:lnTo>
+                  <a:lnTo>
+                    <a:pt x="733" y="1026"/>
+                  </a:lnTo>
+                  <a:lnTo>
+                    <a:pt x="1295" y="855"/>
+                  </a:lnTo>
+                  <a:lnTo>
+                    <a:pt x="1661" y="782"/>
+                  </a:lnTo>
+                  <a:lnTo>
+                    <a:pt x="2076" y="684"/>
+                  </a:lnTo>
+                  <a:lnTo>
+                    <a:pt x="2540" y="611"/>
+                  </a:lnTo>
+                  <a:lnTo>
+                    <a:pt x="3029" y="562"/>
+                  </a:lnTo>
+                  <a:lnTo>
+                    <a:pt x="3591" y="513"/>
+                  </a:lnTo>
+                  <a:lnTo>
+                    <a:pt x="4177" y="489"/>
+                  </a:lnTo>
+                  <a:lnTo>
+                    <a:pt x="4616" y="513"/>
+                  </a:lnTo>
+                  <a:lnTo>
+                    <a:pt x="5032" y="538"/>
+                  </a:lnTo>
+                  <a:lnTo>
+                    <a:pt x="5422" y="611"/>
+                  </a:lnTo>
+                  <a:lnTo>
+                    <a:pt x="5789" y="684"/>
+                  </a:lnTo>
+                  <a:lnTo>
+                    <a:pt x="6131" y="782"/>
+                  </a:lnTo>
+                  <a:lnTo>
+                    <a:pt x="6448" y="880"/>
+                  </a:lnTo>
+                  <a:lnTo>
+                    <a:pt x="6717" y="1002"/>
+                  </a:lnTo>
+                  <a:lnTo>
+                    <a:pt x="6985" y="1124"/>
+                  </a:lnTo>
+                  <a:lnTo>
+                    <a:pt x="7205" y="1246"/>
+                  </a:lnTo>
+                  <a:lnTo>
+                    <a:pt x="7425" y="1393"/>
+                  </a:lnTo>
+                  <a:lnTo>
+                    <a:pt x="7791" y="1661"/>
+                  </a:lnTo>
+                  <a:lnTo>
+                    <a:pt x="8084" y="1930"/>
+                  </a:lnTo>
+                  <a:lnTo>
+                    <a:pt x="8329" y="2150"/>
+                  </a:lnTo>
+                  <a:lnTo>
+                    <a:pt x="8329" y="1661"/>
+                  </a:lnTo>
+                  <a:lnTo>
+                    <a:pt x="8084" y="1441"/>
+                  </a:lnTo>
+                  <a:lnTo>
+                    <a:pt x="7791" y="1173"/>
+                  </a:lnTo>
+                  <a:lnTo>
+                    <a:pt x="7425" y="904"/>
+                  </a:lnTo>
+                  <a:lnTo>
+                    <a:pt x="7205" y="758"/>
+                  </a:lnTo>
+                  <a:lnTo>
+                    <a:pt x="6985" y="635"/>
+                  </a:lnTo>
+                  <a:lnTo>
+                    <a:pt x="6717" y="513"/>
+                  </a:lnTo>
+                  <a:lnTo>
+                    <a:pt x="6448" y="391"/>
+                  </a:lnTo>
+                  <a:lnTo>
+                    <a:pt x="6131" y="294"/>
+                  </a:lnTo>
+                  <a:lnTo>
+                    <a:pt x="5789" y="196"/>
+                  </a:lnTo>
+                  <a:lnTo>
+                    <a:pt x="5422" y="123"/>
+                  </a:lnTo>
+                  <a:lnTo>
+                    <a:pt x="5032" y="49"/>
+                  </a:lnTo>
+                  <a:lnTo>
+                    <a:pt x="4616" y="25"/>
+                  </a:lnTo>
+                  <a:lnTo>
+                    <a:pt x="4177" y="0"/>
+                  </a:lnTo>
+                  <a:lnTo>
+                    <a:pt x="3591" y="25"/>
+                  </a:lnTo>
+                  <a:lnTo>
+                    <a:pt x="3029" y="74"/>
+                  </a:lnTo>
+                  <a:lnTo>
+                    <a:pt x="2540" y="123"/>
+                  </a:lnTo>
+                  <a:lnTo>
+                    <a:pt x="2076" y="196"/>
+                  </a:lnTo>
+                  <a:lnTo>
+                    <a:pt x="1661" y="294"/>
+                  </a:lnTo>
+                  <a:lnTo>
+                    <a:pt x="1295" y="367"/>
+                  </a:lnTo>
+                  <a:lnTo>
+                    <a:pt x="733" y="538"/>
+                  </a:lnTo>
+                  <a:lnTo>
+                    <a:pt x="562" y="562"/>
+                  </a:lnTo>
+                  <a:lnTo>
+                    <a:pt x="391" y="538"/>
+                  </a:lnTo>
+                  <a:lnTo>
+                    <a:pt x="245" y="465"/>
+                  </a:lnTo>
+                  <a:lnTo>
+                    <a:pt x="147" y="367"/>
+                  </a:lnTo>
+                  <a:lnTo>
+                    <a:pt x="74" y="269"/>
+                  </a:lnTo>
+                  <a:lnTo>
+                    <a:pt x="25" y="147"/>
+                  </a:lnTo>
+                  <a:lnTo>
+                    <a:pt x="0" y="0"/>
+                  </a:lnTo>
+                  <a:close/>
+                </a:path>
+              </a:pathLst>
+            </a:custGeom>
+            <a:solidFill>
+              <a:srgbClr val="000000"/>
+            </a:solidFill>
+            <a:ln>
+              <a:noFill/>
+            </a:ln>
+          </p:spPr>
+          <p:txBody>
+            <a:bodyPr spcFirstLastPara="1" wrap="square" lIns="121900" tIns="121900" rIns="121900" bIns="121900" anchor="ctr" anchorCtr="0">
+              <a:noAutofit/>
+            </a:bodyPr>
+            <a:lstStyle/>
+            <a:p>
+              <a:pPr defTabSz="1219170">
+                <a:buClr>
+                  <a:srgbClr val="000000"/>
+                </a:buClr>
+              </a:pPr>
+              <a:endParaRPr sz="1867" kern="0">
+                <a:solidFill>
+                  <a:srgbClr val="000000"/>
+                </a:solidFill>
+                <a:latin typeface="Arial"/>
+                <a:cs typeface="Arial"/>
+                <a:sym typeface="Arial"/>
+              </a:endParaRPr>
+            </a:p>
+          </p:txBody>
+        </p:sp>
+        <p:sp>
+          <p:nvSpPr>
+            <p:cNvPr id="75" name="Google Shape;75;p13"/>
+            <p:cNvSpPr/>
+            <p:nvPr/>
+          </p:nvSpPr>
+          <p:spPr>
+            <a:xfrm>
+              <a:off x="2146775" y="1298075"/>
+              <a:ext cx="208225" cy="53750"/>
+            </a:xfrm>
+            <a:custGeom>
+              <a:avLst/>
+              <a:gdLst/>
+              <a:ahLst/>
+              <a:cxnLst/>
+              <a:rect l="l" t="t" r="r" b="b"/>
+              <a:pathLst>
+                <a:path w="8329" h="2150" extrusionOk="0">
+                  <a:moveTo>
+                    <a:pt x="4152" y="0"/>
+                  </a:moveTo>
+                  <a:lnTo>
+                    <a:pt x="3712" y="25"/>
+                  </a:lnTo>
+                  <a:lnTo>
+                    <a:pt x="3297" y="49"/>
+                  </a:lnTo>
+                  <a:lnTo>
+                    <a:pt x="2907" y="123"/>
+                  </a:lnTo>
+                  <a:lnTo>
+                    <a:pt x="2540" y="196"/>
+                  </a:lnTo>
+                  <a:lnTo>
+                    <a:pt x="2198" y="294"/>
+                  </a:lnTo>
+                  <a:lnTo>
+                    <a:pt x="1881" y="391"/>
+                  </a:lnTo>
+                  <a:lnTo>
+                    <a:pt x="1612" y="513"/>
+                  </a:lnTo>
+                  <a:lnTo>
+                    <a:pt x="1343" y="635"/>
+                  </a:lnTo>
+                  <a:lnTo>
+                    <a:pt x="1124" y="758"/>
+                  </a:lnTo>
+                  <a:lnTo>
+                    <a:pt x="904" y="904"/>
+                  </a:lnTo>
+                  <a:lnTo>
+                    <a:pt x="537" y="1173"/>
+                  </a:lnTo>
+                  <a:lnTo>
+                    <a:pt x="244" y="1441"/>
+                  </a:lnTo>
+                  <a:lnTo>
+                    <a:pt x="0" y="1661"/>
+                  </a:lnTo>
+                  <a:lnTo>
+                    <a:pt x="0" y="2150"/>
+                  </a:lnTo>
+                  <a:lnTo>
+                    <a:pt x="244" y="1930"/>
+                  </a:lnTo>
+                  <a:lnTo>
+                    <a:pt x="537" y="1661"/>
+                  </a:lnTo>
+                  <a:lnTo>
+                    <a:pt x="904" y="1393"/>
+                  </a:lnTo>
+                  <a:lnTo>
+                    <a:pt x="1124" y="1246"/>
+                  </a:lnTo>
+                  <a:lnTo>
+                    <a:pt x="1343" y="1124"/>
+                  </a:lnTo>
+                  <a:lnTo>
+                    <a:pt x="1612" y="1002"/>
+                  </a:lnTo>
+                  <a:lnTo>
+                    <a:pt x="1881" y="880"/>
+                  </a:lnTo>
+                  <a:lnTo>
+                    <a:pt x="2198" y="782"/>
+                  </a:lnTo>
+                  <a:lnTo>
+                    <a:pt x="2540" y="684"/>
+                  </a:lnTo>
+                  <a:lnTo>
+                    <a:pt x="2907" y="611"/>
+                  </a:lnTo>
+                  <a:lnTo>
+                    <a:pt x="3297" y="538"/>
+                  </a:lnTo>
+                  <a:lnTo>
+                    <a:pt x="3712" y="513"/>
+                  </a:lnTo>
+                  <a:lnTo>
+                    <a:pt x="4152" y="489"/>
+                  </a:lnTo>
+                  <a:lnTo>
+                    <a:pt x="4738" y="513"/>
+                  </a:lnTo>
+                  <a:lnTo>
+                    <a:pt x="5300" y="562"/>
+                  </a:lnTo>
+                  <a:lnTo>
+                    <a:pt x="5788" y="611"/>
+                  </a:lnTo>
+                  <a:lnTo>
+                    <a:pt x="6252" y="684"/>
+                  </a:lnTo>
+                  <a:lnTo>
+                    <a:pt x="6668" y="782"/>
+                  </a:lnTo>
+                  <a:lnTo>
+                    <a:pt x="7034" y="855"/>
+                  </a:lnTo>
+                  <a:lnTo>
+                    <a:pt x="7596" y="1026"/>
+                  </a:lnTo>
+                  <a:lnTo>
+                    <a:pt x="7767" y="1051"/>
+                  </a:lnTo>
+                  <a:lnTo>
+                    <a:pt x="7938" y="1026"/>
+                  </a:lnTo>
+                  <a:lnTo>
+                    <a:pt x="8084" y="953"/>
+                  </a:lnTo>
+                  <a:lnTo>
+                    <a:pt x="8182" y="855"/>
+                  </a:lnTo>
+                  <a:lnTo>
+                    <a:pt x="8255" y="758"/>
+                  </a:lnTo>
+                  <a:lnTo>
+                    <a:pt x="8304" y="635"/>
+                  </a:lnTo>
+                  <a:lnTo>
+                    <a:pt x="8328" y="489"/>
+                  </a:lnTo>
+                  <a:lnTo>
+                    <a:pt x="8328" y="0"/>
+                  </a:lnTo>
+                  <a:lnTo>
+                    <a:pt x="8304" y="147"/>
+                  </a:lnTo>
+                  <a:lnTo>
+                    <a:pt x="8255" y="269"/>
+                  </a:lnTo>
+                  <a:lnTo>
+                    <a:pt x="8182" y="367"/>
+                  </a:lnTo>
+                  <a:lnTo>
+                    <a:pt x="8084" y="465"/>
+                  </a:lnTo>
+                  <a:lnTo>
+                    <a:pt x="7938" y="538"/>
+                  </a:lnTo>
+                  <a:lnTo>
+                    <a:pt x="7767" y="562"/>
+                  </a:lnTo>
+                  <a:lnTo>
+                    <a:pt x="7596" y="538"/>
+                  </a:lnTo>
+                  <a:lnTo>
+                    <a:pt x="7034" y="367"/>
+                  </a:lnTo>
+                  <a:lnTo>
+                    <a:pt x="6668" y="294"/>
+                  </a:lnTo>
+                  <a:lnTo>
+                    <a:pt x="6252" y="196"/>
+                  </a:lnTo>
+                  <a:lnTo>
+                    <a:pt x="5788" y="123"/>
+                  </a:lnTo>
+                  <a:lnTo>
+                    <a:pt x="5300" y="74"/>
+                  </a:lnTo>
+                  <a:lnTo>
+                    <a:pt x="4738" y="25"/>
+                  </a:lnTo>
+                  <a:lnTo>
+                    <a:pt x="4152" y="0"/>
+                  </a:lnTo>
+                  <a:close/>
+                </a:path>
+              </a:pathLst>
+            </a:custGeom>
+            <a:solidFill>
+              <a:srgbClr val="000000"/>
+            </a:solidFill>
+            <a:ln>
+              <a:noFill/>
+            </a:ln>
+          </p:spPr>
+          <p:txBody>
+            <a:bodyPr spcFirstLastPara="1" wrap="square" lIns="121900" tIns="121900" rIns="121900" bIns="121900" anchor="ctr" anchorCtr="0">
+              <a:noAutofit/>
+            </a:bodyPr>
+            <a:lstStyle/>
+            <a:p>
+              <a:pPr defTabSz="1219170">
+                <a:buClr>
+                  <a:srgbClr val="000000"/>
+                </a:buClr>
+              </a:pPr>
+              <a:endParaRPr sz="1867" kern="0">
+                <a:solidFill>
+                  <a:srgbClr val="000000"/>
+                </a:solidFill>
+                <a:latin typeface="Arial"/>
+                <a:cs typeface="Arial"/>
+                <a:sym typeface="Arial"/>
+              </a:endParaRPr>
+            </a:p>
+          </p:txBody>
+        </p:sp>
+        <p:sp>
+          <p:nvSpPr>
+            <p:cNvPr id="76" name="Google Shape;76;p13"/>
+            <p:cNvSpPr/>
+            <p:nvPr/>
+          </p:nvSpPr>
+          <p:spPr>
+            <a:xfrm>
+              <a:off x="1926350" y="995225"/>
+              <a:ext cx="208225" cy="332175"/>
+            </a:xfrm>
+            <a:custGeom>
+              <a:avLst/>
+              <a:gdLst/>
+              <a:ahLst/>
+              <a:cxnLst/>
+              <a:rect l="l" t="t" r="r" b="b"/>
+              <a:pathLst>
+                <a:path w="8329" h="13287" extrusionOk="0">
+                  <a:moveTo>
+                    <a:pt x="4177" y="1"/>
+                  </a:moveTo>
+                  <a:lnTo>
+                    <a:pt x="3591" y="25"/>
+                  </a:lnTo>
+                  <a:lnTo>
+                    <a:pt x="3029" y="74"/>
+                  </a:lnTo>
+                  <a:lnTo>
+                    <a:pt x="2467" y="196"/>
+                  </a:lnTo>
+                  <a:lnTo>
+                    <a:pt x="1905" y="343"/>
+                  </a:lnTo>
+                  <a:lnTo>
+                    <a:pt x="1393" y="538"/>
+                  </a:lnTo>
+                  <a:lnTo>
+                    <a:pt x="929" y="758"/>
+                  </a:lnTo>
+                  <a:lnTo>
+                    <a:pt x="513" y="978"/>
+                  </a:lnTo>
+                  <a:lnTo>
+                    <a:pt x="342" y="1124"/>
+                  </a:lnTo>
+                  <a:lnTo>
+                    <a:pt x="196" y="1246"/>
+                  </a:lnTo>
+                  <a:lnTo>
+                    <a:pt x="123" y="1319"/>
+                  </a:lnTo>
+                  <a:lnTo>
+                    <a:pt x="49" y="1442"/>
+                  </a:lnTo>
+                  <a:lnTo>
+                    <a:pt x="25" y="1539"/>
+                  </a:lnTo>
+                  <a:lnTo>
+                    <a:pt x="0" y="1661"/>
+                  </a:lnTo>
+                  <a:lnTo>
+                    <a:pt x="0" y="11626"/>
+                  </a:lnTo>
+                  <a:lnTo>
+                    <a:pt x="25" y="11773"/>
+                  </a:lnTo>
+                  <a:lnTo>
+                    <a:pt x="74" y="11895"/>
+                  </a:lnTo>
+                  <a:lnTo>
+                    <a:pt x="147" y="11992"/>
+                  </a:lnTo>
+                  <a:lnTo>
+                    <a:pt x="245" y="12090"/>
+                  </a:lnTo>
+                  <a:lnTo>
+                    <a:pt x="391" y="12163"/>
+                  </a:lnTo>
+                  <a:lnTo>
+                    <a:pt x="562" y="12188"/>
+                  </a:lnTo>
+                  <a:lnTo>
+                    <a:pt x="733" y="12163"/>
+                  </a:lnTo>
+                  <a:lnTo>
+                    <a:pt x="1295" y="11992"/>
+                  </a:lnTo>
+                  <a:lnTo>
+                    <a:pt x="1661" y="11919"/>
+                  </a:lnTo>
+                  <a:lnTo>
+                    <a:pt x="2076" y="11821"/>
+                  </a:lnTo>
+                  <a:lnTo>
+                    <a:pt x="2540" y="11748"/>
+                  </a:lnTo>
+                  <a:lnTo>
+                    <a:pt x="3029" y="11699"/>
+                  </a:lnTo>
+                  <a:lnTo>
+                    <a:pt x="3591" y="11650"/>
+                  </a:lnTo>
+                  <a:lnTo>
+                    <a:pt x="4177" y="11626"/>
+                  </a:lnTo>
+                  <a:lnTo>
+                    <a:pt x="4616" y="11650"/>
+                  </a:lnTo>
+                  <a:lnTo>
+                    <a:pt x="5032" y="11675"/>
+                  </a:lnTo>
+                  <a:lnTo>
+                    <a:pt x="5422" y="11748"/>
+                  </a:lnTo>
+                  <a:lnTo>
+                    <a:pt x="5789" y="11821"/>
+                  </a:lnTo>
+                  <a:lnTo>
+                    <a:pt x="6131" y="11919"/>
+                  </a:lnTo>
+                  <a:lnTo>
+                    <a:pt x="6448" y="12017"/>
+                  </a:lnTo>
+                  <a:lnTo>
+                    <a:pt x="6717" y="12139"/>
+                  </a:lnTo>
+                  <a:lnTo>
+                    <a:pt x="6985" y="12261"/>
+                  </a:lnTo>
+                  <a:lnTo>
+                    <a:pt x="7205" y="12383"/>
+                  </a:lnTo>
+                  <a:lnTo>
+                    <a:pt x="7425" y="12530"/>
+                  </a:lnTo>
+                  <a:lnTo>
+                    <a:pt x="7791" y="12798"/>
+                  </a:lnTo>
+                  <a:lnTo>
+                    <a:pt x="8084" y="13067"/>
+                  </a:lnTo>
+                  <a:lnTo>
+                    <a:pt x="8329" y="13287"/>
+                  </a:lnTo>
+                  <a:lnTo>
+                    <a:pt x="8329" y="2199"/>
+                  </a:lnTo>
+                  <a:lnTo>
+                    <a:pt x="8329" y="2101"/>
+                  </a:lnTo>
+                  <a:lnTo>
+                    <a:pt x="8280" y="1979"/>
+                  </a:lnTo>
+                  <a:lnTo>
+                    <a:pt x="8231" y="1881"/>
+                  </a:lnTo>
+                  <a:lnTo>
+                    <a:pt x="8158" y="1808"/>
+                  </a:lnTo>
+                  <a:lnTo>
+                    <a:pt x="8036" y="1686"/>
+                  </a:lnTo>
+                  <a:lnTo>
+                    <a:pt x="7767" y="1442"/>
+                  </a:lnTo>
+                  <a:lnTo>
+                    <a:pt x="7449" y="1173"/>
+                  </a:lnTo>
+                  <a:lnTo>
+                    <a:pt x="7083" y="904"/>
+                  </a:lnTo>
+                  <a:lnTo>
+                    <a:pt x="6644" y="611"/>
+                  </a:lnTo>
+                  <a:lnTo>
+                    <a:pt x="6375" y="489"/>
+                  </a:lnTo>
+                  <a:lnTo>
+                    <a:pt x="6131" y="367"/>
+                  </a:lnTo>
+                  <a:lnTo>
+                    <a:pt x="5838" y="269"/>
+                  </a:lnTo>
+                  <a:lnTo>
+                    <a:pt x="5544" y="172"/>
+                  </a:lnTo>
+                  <a:lnTo>
+                    <a:pt x="5227" y="98"/>
+                  </a:lnTo>
+                  <a:lnTo>
+                    <a:pt x="4885" y="49"/>
+                  </a:lnTo>
+                  <a:lnTo>
+                    <a:pt x="4543" y="1"/>
+                  </a:lnTo>
+                  <a:close/>
+                </a:path>
+              </a:pathLst>
+            </a:custGeom>
+            <a:solidFill>
+              <a:srgbClr val="000000"/>
+            </a:solidFill>
+            <a:ln>
+              <a:noFill/>
+            </a:ln>
+          </p:spPr>
+          <p:txBody>
+            <a:bodyPr spcFirstLastPara="1" wrap="square" lIns="121900" tIns="121900" rIns="121900" bIns="121900" anchor="ctr" anchorCtr="0">
+              <a:noAutofit/>
+            </a:bodyPr>
+            <a:lstStyle/>
+            <a:p>
+              <a:pPr defTabSz="1219170">
+                <a:buClr>
+                  <a:srgbClr val="000000"/>
+                </a:buClr>
+              </a:pPr>
+              <a:endParaRPr sz="1867" kern="0">
+                <a:solidFill>
+                  <a:srgbClr val="000000"/>
+                </a:solidFill>
+                <a:latin typeface="Arial"/>
+                <a:cs typeface="Arial"/>
+                <a:sym typeface="Arial"/>
+              </a:endParaRPr>
+            </a:p>
+          </p:txBody>
+        </p:sp>
+        <p:sp>
+          <p:nvSpPr>
+            <p:cNvPr id="77" name="Google Shape;77;p13"/>
+            <p:cNvSpPr/>
+            <p:nvPr/>
+          </p:nvSpPr>
+          <p:spPr>
+            <a:xfrm>
+              <a:off x="2146775" y="995225"/>
+              <a:ext cx="208225" cy="332175"/>
+            </a:xfrm>
+            <a:custGeom>
+              <a:avLst/>
+              <a:gdLst/>
+              <a:ahLst/>
+              <a:cxnLst/>
+              <a:rect l="l" t="t" r="r" b="b"/>
+              <a:pathLst>
+                <a:path w="8329" h="13287" extrusionOk="0">
+                  <a:moveTo>
+                    <a:pt x="3786" y="1"/>
+                  </a:moveTo>
+                  <a:lnTo>
+                    <a:pt x="3444" y="49"/>
+                  </a:lnTo>
+                  <a:lnTo>
+                    <a:pt x="3102" y="98"/>
+                  </a:lnTo>
+                  <a:lnTo>
+                    <a:pt x="2784" y="172"/>
+                  </a:lnTo>
+                  <a:lnTo>
+                    <a:pt x="2491" y="269"/>
+                  </a:lnTo>
+                  <a:lnTo>
+                    <a:pt x="2198" y="367"/>
+                  </a:lnTo>
+                  <a:lnTo>
+                    <a:pt x="1954" y="489"/>
+                  </a:lnTo>
+                  <a:lnTo>
+                    <a:pt x="1685" y="611"/>
+                  </a:lnTo>
+                  <a:lnTo>
+                    <a:pt x="1246" y="904"/>
+                  </a:lnTo>
+                  <a:lnTo>
+                    <a:pt x="879" y="1173"/>
+                  </a:lnTo>
+                  <a:lnTo>
+                    <a:pt x="562" y="1442"/>
+                  </a:lnTo>
+                  <a:lnTo>
+                    <a:pt x="293" y="1686"/>
+                  </a:lnTo>
+                  <a:lnTo>
+                    <a:pt x="171" y="1808"/>
+                  </a:lnTo>
+                  <a:lnTo>
+                    <a:pt x="98" y="1881"/>
+                  </a:lnTo>
+                  <a:lnTo>
+                    <a:pt x="49" y="1979"/>
+                  </a:lnTo>
+                  <a:lnTo>
+                    <a:pt x="0" y="2101"/>
+                  </a:lnTo>
+                  <a:lnTo>
+                    <a:pt x="0" y="2199"/>
+                  </a:lnTo>
+                  <a:lnTo>
+                    <a:pt x="0" y="13287"/>
+                  </a:lnTo>
+                  <a:lnTo>
+                    <a:pt x="244" y="13067"/>
+                  </a:lnTo>
+                  <a:lnTo>
+                    <a:pt x="537" y="12798"/>
+                  </a:lnTo>
+                  <a:lnTo>
+                    <a:pt x="904" y="12530"/>
+                  </a:lnTo>
+                  <a:lnTo>
+                    <a:pt x="1124" y="12383"/>
+                  </a:lnTo>
+                  <a:lnTo>
+                    <a:pt x="1343" y="12261"/>
+                  </a:lnTo>
+                  <a:lnTo>
+                    <a:pt x="1612" y="12139"/>
+                  </a:lnTo>
+                  <a:lnTo>
+                    <a:pt x="1881" y="12017"/>
+                  </a:lnTo>
+                  <a:lnTo>
+                    <a:pt x="2198" y="11919"/>
+                  </a:lnTo>
+                  <a:lnTo>
+                    <a:pt x="2540" y="11821"/>
+                  </a:lnTo>
+                  <a:lnTo>
+                    <a:pt x="2907" y="11748"/>
+                  </a:lnTo>
+                  <a:lnTo>
+                    <a:pt x="3297" y="11675"/>
+                  </a:lnTo>
+                  <a:lnTo>
+                    <a:pt x="3712" y="11650"/>
+                  </a:lnTo>
+                  <a:lnTo>
+                    <a:pt x="4152" y="11626"/>
+                  </a:lnTo>
+                  <a:lnTo>
+                    <a:pt x="4738" y="11650"/>
+                  </a:lnTo>
+                  <a:lnTo>
+                    <a:pt x="5300" y="11699"/>
+                  </a:lnTo>
+                  <a:lnTo>
+                    <a:pt x="5788" y="11748"/>
+                  </a:lnTo>
+                  <a:lnTo>
+                    <a:pt x="6252" y="11821"/>
+                  </a:lnTo>
+                  <a:lnTo>
+                    <a:pt x="6668" y="11919"/>
+                  </a:lnTo>
+                  <a:lnTo>
+                    <a:pt x="7034" y="11992"/>
+                  </a:lnTo>
+                  <a:lnTo>
+                    <a:pt x="7596" y="12163"/>
+                  </a:lnTo>
+                  <a:lnTo>
+                    <a:pt x="7767" y="12188"/>
+                  </a:lnTo>
+                  <a:lnTo>
+                    <a:pt x="7938" y="12163"/>
+                  </a:lnTo>
+                  <a:lnTo>
+                    <a:pt x="8084" y="12090"/>
+                  </a:lnTo>
+                  <a:lnTo>
+                    <a:pt x="8182" y="11992"/>
+                  </a:lnTo>
+                  <a:lnTo>
+                    <a:pt x="8255" y="11895"/>
+                  </a:lnTo>
+                  <a:lnTo>
+                    <a:pt x="8304" y="11773"/>
+                  </a:lnTo>
+                  <a:lnTo>
+                    <a:pt x="8328" y="11626"/>
+                  </a:lnTo>
+                  <a:lnTo>
+                    <a:pt x="8328" y="1661"/>
+                  </a:lnTo>
+                  <a:lnTo>
+                    <a:pt x="8304" y="1539"/>
+                  </a:lnTo>
+                  <a:lnTo>
+                    <a:pt x="8280" y="1442"/>
+                  </a:lnTo>
+                  <a:lnTo>
+                    <a:pt x="8206" y="1319"/>
+                  </a:lnTo>
+                  <a:lnTo>
+                    <a:pt x="8133" y="1246"/>
+                  </a:lnTo>
+                  <a:lnTo>
+                    <a:pt x="7987" y="1124"/>
+                  </a:lnTo>
+                  <a:lnTo>
+                    <a:pt x="7816" y="978"/>
+                  </a:lnTo>
+                  <a:lnTo>
+                    <a:pt x="7400" y="758"/>
+                  </a:lnTo>
+                  <a:lnTo>
+                    <a:pt x="6936" y="538"/>
+                  </a:lnTo>
+                  <a:lnTo>
+                    <a:pt x="6423" y="343"/>
+                  </a:lnTo>
+                  <a:lnTo>
+                    <a:pt x="5862" y="196"/>
+                  </a:lnTo>
+                  <a:lnTo>
+                    <a:pt x="5300" y="74"/>
+                  </a:lnTo>
+                  <a:lnTo>
+                    <a:pt x="4738" y="25"/>
+                  </a:lnTo>
+                  <a:lnTo>
+                    <a:pt x="4152" y="1"/>
+                  </a:lnTo>
+                  <a:close/>
+                </a:path>
+              </a:pathLst>
+            </a:custGeom>
+            <a:solidFill>
+              <a:srgbClr val="000000"/>
+            </a:solidFill>
+            <a:ln>
+              <a:noFill/>
+            </a:ln>
+          </p:spPr>
+          <p:txBody>
+            <a:bodyPr spcFirstLastPara="1" wrap="square" lIns="121900" tIns="121900" rIns="121900" bIns="121900" anchor="ctr" anchorCtr="0">
+              <a:noAutofit/>
+            </a:bodyPr>
+            <a:lstStyle/>
+            <a:p>
+              <a:pPr defTabSz="1219170">
+                <a:buClr>
+                  <a:srgbClr val="000000"/>
+                </a:buClr>
+              </a:pPr>
+              <a:endParaRPr sz="1867" kern="0">
+                <a:solidFill>
+                  <a:srgbClr val="000000"/>
+                </a:solidFill>
+                <a:latin typeface="Arial"/>
+                <a:cs typeface="Arial"/>
+                <a:sym typeface="Arial"/>
+              </a:endParaRPr>
+            </a:p>
+          </p:txBody>
+        </p:sp>
+      </p:grpSp>
+      <p:sp>
+        <p:nvSpPr>
+          <p:cNvPr id="78" name="Google Shape;78;p13"/>
+          <p:cNvSpPr txBox="1">
+            <a:spLocks noGrp="1"/>
+          </p:cNvSpPr>
+          <p:nvPr>
+            <p:ph type="sldNum" idx="12"/>
+          </p:nvPr>
+        </p:nvSpPr>
+        <p:spPr>
+          <a:xfrm>
+            <a:off x="10879332" y="5857704"/>
+            <a:ext cx="731600" cy="524800"/>
+          </a:xfrm>
+          <a:prstGeom prst="rect">
+            <a:avLst/>
+          </a:prstGeom>
+        </p:spPr>
+        <p:txBody>
+          <a:bodyPr spcFirstLastPara="1" wrap="square" lIns="121900" tIns="121900" rIns="121900" bIns="121900" anchor="ctr" anchorCtr="0">
+            <a:noAutofit/>
+          </a:bodyPr>
+          <a:lstStyle/>
+          <a:p>
+            <a:pPr defTabSz="1219170">
+              <a:buClr>
+                <a:srgbClr val="000000"/>
+              </a:buClr>
+            </a:pPr>
+            <a:fld id="{00000000-1234-1234-1234-123412341234}" type="slidenum">
+              <a:rPr lang="en" kern="0">
+                <a:solidFill>
+                  <a:srgbClr val="000000"/>
+                </a:solidFill>
+              </a:rPr>
+              <a:pPr defTabSz="1219170">
+                <a:buClr>
+                  <a:srgbClr val="000000"/>
+                </a:buClr>
+              </a:pPr>
+              <a:t>3</a:t>
+            </a:fld>
+            <a:endParaRPr kern="0">
+              <a:solidFill>
+                <a:srgbClr val="000000"/>
+              </a:solidFill>
+            </a:endParaRPr>
+          </a:p>
+        </p:txBody>
+      </p:sp>
+      <p:sp>
+        <p:nvSpPr>
+          <p:cNvPr id="6" name="Google Shape;69;p13">
+            <a:extLst>
+              <a:ext uri="{FF2B5EF4-FFF2-40B4-BE49-F238E27FC236}">
+                <a16:creationId xmlns:a16="http://schemas.microsoft.com/office/drawing/2014/main" id="{8368140B-F31C-2FE6-7F1A-7FBD23207677}"/>
+              </a:ext>
+            </a:extLst>
+          </p:cNvPr>
+          <p:cNvSpPr txBox="1">
+            <a:spLocks/>
+          </p:cNvSpPr>
+          <p:nvPr/>
+        </p:nvSpPr>
+        <p:spPr>
+          <a:xfrm>
             <a:off x="1158865" y="2355817"/>
             <a:ext cx="9965480" cy="960867"/>
           </a:xfrm>
@@ -10524,253 +12307,6 @@
                 </a:solidFill>
               </a:rPr>
               <a:t>2. Xây dựng DQN đơn giản để huấn luyện dựa trên môi trường.</a:t>
-            </a:r>
-          </a:p>
-        </p:txBody>
-      </p:sp>
-    </p:spTree>
-  </p:cSld>
-  <p:clrMapOvr>
-    <a:masterClrMapping/>
-  </p:clrMapOvr>
-</p:sld>
-</file>
-
-<file path=ppt/slides/slide3.xml><?xml version="1.0" encoding="utf-8"?>
-<p:sld xmlns:a="http://schemas.openxmlformats.org/drawingml/2006/main" xmlns:r="http://schemas.openxmlformats.org/officeDocument/2006/relationships" xmlns:p="http://schemas.openxmlformats.org/presentationml/2006/main">
-  <p:cSld>
-    <p:spTree>
-      <p:nvGrpSpPr>
-        <p:cNvPr id="1" name="Shape 82"/>
-        <p:cNvGrpSpPr/>
-        <p:nvPr/>
-      </p:nvGrpSpPr>
-      <p:grpSpPr>
-        <a:xfrm>
-          <a:off x="0" y="0"/>
-          <a:ext cx="0" cy="0"/>
-          <a:chOff x="0" y="0"/>
-          <a:chExt cx="0" cy="0"/>
-        </a:xfrm>
-      </p:grpSpPr>
-      <p:sp>
-        <p:nvSpPr>
-          <p:cNvPr id="83" name="Google Shape;83;p14"/>
-          <p:cNvSpPr txBox="1">
-            <a:spLocks noGrp="1"/>
-          </p:cNvSpPr>
-          <p:nvPr>
-            <p:ph type="ctrTitle" idx="4294967295"/>
-          </p:nvPr>
-        </p:nvSpPr>
-        <p:spPr>
-          <a:xfrm>
-            <a:off x="914401" y="545170"/>
-            <a:ext cx="7907455" cy="1167095"/>
-          </a:xfrm>
-          <a:prstGeom prst="rect">
-            <a:avLst/>
-          </a:prstGeom>
-        </p:spPr>
-        <p:txBody>
-          <a:bodyPr spcFirstLastPara="1" wrap="square" lIns="121900" tIns="121900" rIns="121900" bIns="121900" anchor="b" anchorCtr="0">
-            <a:noAutofit/>
-          </a:bodyPr>
-          <a:lstStyle/>
-          <a:p>
-            <a:r>
-              <a:rPr lang="en-US"/>
-              <a:t>1. Xây dựng môi trường</a:t>
-            </a:r>
-            <a:endParaRPr/>
-          </a:p>
-        </p:txBody>
-      </p:sp>
-      <p:sp>
-        <p:nvSpPr>
-          <p:cNvPr id="84" name="Google Shape;84;p14"/>
-          <p:cNvSpPr txBox="1">
-            <a:spLocks noGrp="1"/>
-          </p:cNvSpPr>
-          <p:nvPr>
-            <p:ph type="subTitle" idx="4294967295"/>
-          </p:nvPr>
-        </p:nvSpPr>
-        <p:spPr>
-          <a:xfrm>
-            <a:off x="1191942" y="1804020"/>
-            <a:ext cx="4458009" cy="614984"/>
-          </a:xfrm>
-          <a:prstGeom prst="rect">
-            <a:avLst/>
-          </a:prstGeom>
-        </p:spPr>
-        <p:txBody>
-          <a:bodyPr spcFirstLastPara="1" wrap="square" lIns="121900" tIns="121900" rIns="121900" bIns="121900" anchor="b" anchorCtr="0">
-            <a:noAutofit/>
-          </a:bodyPr>
-          <a:lstStyle/>
-          <a:p>
-            <a:pPr marL="0" indent="0">
-              <a:spcBef>
-                <a:spcPts val="800"/>
-              </a:spcBef>
-              <a:buNone/>
-            </a:pPr>
-            <a:r>
-              <a:rPr lang="en-US" sz="3200" b="1">
-                <a:latin typeface="Work Sans"/>
-                <a:ea typeface="Work Sans"/>
-                <a:cs typeface="Work Sans"/>
-                <a:sym typeface="Work Sans"/>
-              </a:rPr>
-              <a:t>a) Thư viện pygame</a:t>
-            </a:r>
-            <a:endParaRPr sz="3200" b="1">
-              <a:latin typeface="Work Sans"/>
-              <a:ea typeface="Work Sans"/>
-              <a:cs typeface="Work Sans"/>
-              <a:sym typeface="Work Sans"/>
-            </a:endParaRPr>
-          </a:p>
-        </p:txBody>
-      </p:sp>
-      <p:sp>
-        <p:nvSpPr>
-          <p:cNvPr id="86" name="Google Shape;86;p14"/>
-          <p:cNvSpPr txBox="1">
-            <a:spLocks noGrp="1"/>
-          </p:cNvSpPr>
-          <p:nvPr>
-            <p:ph type="sldNum" idx="12"/>
-          </p:nvPr>
-        </p:nvSpPr>
-        <p:spPr>
-          <a:xfrm>
-            <a:off x="10879332" y="5857704"/>
-            <a:ext cx="731600" cy="524800"/>
-          </a:xfrm>
-          <a:prstGeom prst="rect">
-            <a:avLst/>
-          </a:prstGeom>
-        </p:spPr>
-        <p:txBody>
-          <a:bodyPr spcFirstLastPara="1" wrap="square" lIns="121900" tIns="121900" rIns="121900" bIns="121900" anchor="ctr" anchorCtr="0">
-            <a:noAutofit/>
-          </a:bodyPr>
-          <a:lstStyle/>
-          <a:p>
-            <a:pPr defTabSz="1219170">
-              <a:buClr>
-                <a:srgbClr val="000000"/>
-              </a:buClr>
-            </a:pPr>
-            <a:fld id="{00000000-1234-1234-1234-123412341234}" type="slidenum">
-              <a:rPr lang="en" kern="0">
-                <a:solidFill>
-                  <a:srgbClr val="000000"/>
-                </a:solidFill>
-              </a:rPr>
-              <a:pPr defTabSz="1219170">
-                <a:buClr>
-                  <a:srgbClr val="000000"/>
-                </a:buClr>
-              </a:pPr>
-              <a:t>3</a:t>
-            </a:fld>
-            <a:endParaRPr kern="0">
-              <a:solidFill>
-                <a:srgbClr val="000000"/>
-              </a:solidFill>
-            </a:endParaRPr>
-          </a:p>
-        </p:txBody>
-      </p:sp>
-      <p:sp>
-        <p:nvSpPr>
-          <p:cNvPr id="2" name="TextBox 1">
-            <a:extLst>
-              <a:ext uri="{FF2B5EF4-FFF2-40B4-BE49-F238E27FC236}">
-                <a16:creationId xmlns:a16="http://schemas.microsoft.com/office/drawing/2014/main" id="{2EED9A4A-E35B-7EAE-BDA4-2038756931BF}"/>
-              </a:ext>
-            </a:extLst>
-          </p:cNvPr>
-          <p:cNvSpPr txBox="1"/>
-          <p:nvPr/>
-        </p:nvSpPr>
-        <p:spPr>
-          <a:xfrm>
-            <a:off x="1595865" y="2686206"/>
-            <a:ext cx="9148956" cy="2965364"/>
-          </a:xfrm>
-          <a:prstGeom prst="rect">
-            <a:avLst/>
-          </a:prstGeom>
-          <a:noFill/>
-        </p:spPr>
-        <p:txBody>
-          <a:bodyPr wrap="square" rtlCol="0">
-            <a:spAutoFit/>
-          </a:bodyPr>
-          <a:lstStyle/>
-          <a:p>
-            <a:pPr marL="380990" indent="-380990" defTabSz="1219170">
-              <a:buClr>
-                <a:srgbClr val="000000"/>
-              </a:buClr>
-              <a:buFont typeface="Arial" panose="020B0604020202020204" pitchFamily="34" charset="0"/>
-              <a:buChar char="•"/>
-            </a:pPr>
-            <a:r>
-              <a:rPr lang="en-US" sz="2667" b="1" kern="0">
-                <a:solidFill>
-                  <a:srgbClr val="000000"/>
-                </a:solidFill>
-                <a:latin typeface="Work Sans" pitchFamily="2" charset="0"/>
-                <a:cs typeface="Arial"/>
-                <a:sym typeface="Arial"/>
-              </a:rPr>
-              <a:t>Thư viện của Python, tập hợp các module được thiết kế riêng để lập trình game.</a:t>
-            </a:r>
-          </a:p>
-          <a:p>
-            <a:pPr marL="380990" indent="-380990" defTabSz="1219170">
-              <a:buClr>
-                <a:srgbClr val="000000"/>
-              </a:buClr>
-              <a:buFont typeface="Arial" panose="020B0604020202020204" pitchFamily="34" charset="0"/>
-              <a:buChar char="•"/>
-            </a:pPr>
-            <a:r>
-              <a:rPr lang="en-US" sz="2667" b="1" kern="0">
-                <a:solidFill>
-                  <a:srgbClr val="000000"/>
-                </a:solidFill>
-                <a:latin typeface="Work Sans" pitchFamily="2" charset="0"/>
-                <a:cs typeface="Arial"/>
-                <a:sym typeface="Arial"/>
-              </a:rPr>
-              <a:t>Có thể hoạt động trên nhiều nền tảng, hệ điều hành khác nhau.</a:t>
-            </a:r>
-          </a:p>
-          <a:p>
-            <a:pPr marL="380990" indent="-380990" defTabSz="1219170">
-              <a:buClr>
-                <a:srgbClr val="000000"/>
-              </a:buClr>
-              <a:buFont typeface="Arial" panose="020B0604020202020204" pitchFamily="34" charset="0"/>
-              <a:buChar char="•"/>
-            </a:pPr>
-            <a:r>
-              <a:rPr lang="en-US" sz="2667" b="1" kern="0">
-                <a:solidFill>
-                  <a:srgbClr val="000000"/>
-                </a:solidFill>
-                <a:latin typeface="Work Sans" pitchFamily="2" charset="0"/>
-                <a:cs typeface="Arial"/>
-                <a:sym typeface="Arial"/>
-              </a:rPr>
-              <a:t>Xây dựng các trò chơi chạy trên nhiều nền tảng như Windows, Mac, Linux hoặc trên cả thiết bị di động.</a:t>
             </a:r>
           </a:p>
         </p:txBody>
@@ -10826,14 +12362,10 @@
           <a:lstStyle/>
           <a:p>
             <a:r>
-              <a:rPr lang="en-US">
-                <a:latin typeface="Work Sans" pitchFamily="2" charset="0"/>
-              </a:rPr>
+              <a:rPr lang="en-US"/>
               <a:t>1. Xây dựng môi trường</a:t>
             </a:r>
-            <a:endParaRPr>
-              <a:latin typeface="Work Sans" pitchFamily="2" charset="0"/>
-            </a:endParaRPr>
+            <a:endParaRPr/>
           </a:p>
         </p:txBody>
       </p:sp>
@@ -10870,7 +12402,7 @@
             </a:pPr>
             <a:r>
               <a:rPr lang="en-US" sz="3200" b="1">
-                <a:latin typeface="Work Sans" pitchFamily="2" charset="0"/>
+                <a:latin typeface="Work Sans"/>
                 <a:ea typeface="Work Sans"/>
                 <a:cs typeface="Work Sans"/>
                 <a:sym typeface="Work Sans"/>
@@ -10878,7 +12410,7 @@
               <a:t>a) Thư viện pygame</a:t>
             </a:r>
             <a:endParaRPr sz="3200" b="1">
-              <a:latin typeface="Work Sans" pitchFamily="2" charset="0"/>
+              <a:latin typeface="Work Sans"/>
               <a:ea typeface="Work Sans"/>
               <a:cs typeface="Work Sans"/>
               <a:sym typeface="Work Sans"/>
@@ -10921,6 +12453,257 @@
                 <a:solidFill>
                   <a:srgbClr val="000000"/>
                 </a:solidFill>
+              </a:rPr>
+              <a:pPr defTabSz="1219170">
+                <a:buClr>
+                  <a:srgbClr val="000000"/>
+                </a:buClr>
+              </a:pPr>
+              <a:t>4</a:t>
+            </a:fld>
+            <a:endParaRPr kern="0">
+              <a:solidFill>
+                <a:srgbClr val="000000"/>
+              </a:solidFill>
+            </a:endParaRPr>
+          </a:p>
+        </p:txBody>
+      </p:sp>
+      <p:sp>
+        <p:nvSpPr>
+          <p:cNvPr id="2" name="TextBox 1">
+            <a:extLst>
+              <a:ext uri="{FF2B5EF4-FFF2-40B4-BE49-F238E27FC236}">
+                <a16:creationId xmlns:a16="http://schemas.microsoft.com/office/drawing/2014/main" id="{2EED9A4A-E35B-7EAE-BDA4-2038756931BF}"/>
+              </a:ext>
+            </a:extLst>
+          </p:cNvPr>
+          <p:cNvSpPr txBox="1"/>
+          <p:nvPr/>
+        </p:nvSpPr>
+        <p:spPr>
+          <a:xfrm>
+            <a:off x="1595865" y="2686206"/>
+            <a:ext cx="9148956" cy="2965364"/>
+          </a:xfrm>
+          <a:prstGeom prst="rect">
+            <a:avLst/>
+          </a:prstGeom>
+          <a:noFill/>
+        </p:spPr>
+        <p:txBody>
+          <a:bodyPr wrap="square" rtlCol="0">
+            <a:spAutoFit/>
+          </a:bodyPr>
+          <a:lstStyle/>
+          <a:p>
+            <a:pPr marL="380990" indent="-380990" defTabSz="1219170">
+              <a:buClr>
+                <a:srgbClr val="000000"/>
+              </a:buClr>
+              <a:buFont typeface="Arial" panose="020B0604020202020204" pitchFamily="34" charset="0"/>
+              <a:buChar char="•"/>
+            </a:pPr>
+            <a:r>
+              <a:rPr lang="en-US" sz="2667" b="1" kern="0">
+                <a:solidFill>
+                  <a:srgbClr val="000000"/>
+                </a:solidFill>
+                <a:latin typeface="Work Sans" pitchFamily="2" charset="0"/>
+                <a:cs typeface="Arial"/>
+                <a:sym typeface="Arial"/>
+              </a:rPr>
+              <a:t>Thư viện của Python, tập hợp các module được thiết kế riêng để lập trình game.</a:t>
+            </a:r>
+          </a:p>
+          <a:p>
+            <a:pPr marL="380990" indent="-380990" defTabSz="1219170">
+              <a:buClr>
+                <a:srgbClr val="000000"/>
+              </a:buClr>
+              <a:buFont typeface="Arial" panose="020B0604020202020204" pitchFamily="34" charset="0"/>
+              <a:buChar char="•"/>
+            </a:pPr>
+            <a:r>
+              <a:rPr lang="en-US" sz="2667" b="1" kern="0">
+                <a:solidFill>
+                  <a:srgbClr val="000000"/>
+                </a:solidFill>
+                <a:latin typeface="Work Sans" pitchFamily="2" charset="0"/>
+                <a:cs typeface="Arial"/>
+                <a:sym typeface="Arial"/>
+              </a:rPr>
+              <a:t>Có thể hoạt động trên nhiều nền tảng, hệ điều hành khác nhau.</a:t>
+            </a:r>
+          </a:p>
+          <a:p>
+            <a:pPr marL="380990" indent="-380990" defTabSz="1219170">
+              <a:buClr>
+                <a:srgbClr val="000000"/>
+              </a:buClr>
+              <a:buFont typeface="Arial" panose="020B0604020202020204" pitchFamily="34" charset="0"/>
+              <a:buChar char="•"/>
+            </a:pPr>
+            <a:r>
+              <a:rPr lang="en-US" sz="2667" b="1" kern="0">
+                <a:solidFill>
+                  <a:srgbClr val="000000"/>
+                </a:solidFill>
+                <a:latin typeface="Work Sans" pitchFamily="2" charset="0"/>
+                <a:cs typeface="Arial"/>
+                <a:sym typeface="Arial"/>
+              </a:rPr>
+              <a:t>Xây dựng các trò chơi chạy trên nhiều nền tảng như Windows, Mac, Linux hoặc trên cả thiết bị di động.</a:t>
+            </a:r>
+          </a:p>
+        </p:txBody>
+      </p:sp>
+    </p:spTree>
+  </p:cSld>
+  <p:clrMapOvr>
+    <a:masterClrMapping/>
+  </p:clrMapOvr>
+</p:sld>
+</file>
+
+<file path=ppt/slides/slide5.xml><?xml version="1.0" encoding="utf-8"?>
+<p:sld xmlns:a="http://schemas.openxmlformats.org/drawingml/2006/main" xmlns:r="http://schemas.openxmlformats.org/officeDocument/2006/relationships" xmlns:p="http://schemas.openxmlformats.org/presentationml/2006/main">
+  <p:cSld>
+    <p:spTree>
+      <p:nvGrpSpPr>
+        <p:cNvPr id="1" name="Shape 82"/>
+        <p:cNvGrpSpPr/>
+        <p:nvPr/>
+      </p:nvGrpSpPr>
+      <p:grpSpPr>
+        <a:xfrm>
+          <a:off x="0" y="0"/>
+          <a:ext cx="0" cy="0"/>
+          <a:chOff x="0" y="0"/>
+          <a:chExt cx="0" cy="0"/>
+        </a:xfrm>
+      </p:grpSpPr>
+      <p:sp>
+        <p:nvSpPr>
+          <p:cNvPr id="83" name="Google Shape;83;p14"/>
+          <p:cNvSpPr txBox="1">
+            <a:spLocks noGrp="1"/>
+          </p:cNvSpPr>
+          <p:nvPr>
+            <p:ph type="ctrTitle" idx="4294967295"/>
+          </p:nvPr>
+        </p:nvSpPr>
+        <p:spPr>
+          <a:xfrm>
+            <a:off x="914401" y="545170"/>
+            <a:ext cx="7907455" cy="1167095"/>
+          </a:xfrm>
+          <a:prstGeom prst="rect">
+            <a:avLst/>
+          </a:prstGeom>
+        </p:spPr>
+        <p:txBody>
+          <a:bodyPr spcFirstLastPara="1" wrap="square" lIns="121900" tIns="121900" rIns="121900" bIns="121900" anchor="b" anchorCtr="0">
+            <a:noAutofit/>
+          </a:bodyPr>
+          <a:lstStyle/>
+          <a:p>
+            <a:r>
+              <a:rPr lang="en-US">
+                <a:latin typeface="Work Sans" pitchFamily="2" charset="0"/>
+              </a:rPr>
+              <a:t>1. Xây dựng môi trường</a:t>
+            </a:r>
+            <a:endParaRPr>
+              <a:latin typeface="Work Sans" pitchFamily="2" charset="0"/>
+            </a:endParaRPr>
+          </a:p>
+        </p:txBody>
+      </p:sp>
+      <p:sp>
+        <p:nvSpPr>
+          <p:cNvPr id="84" name="Google Shape;84;p14"/>
+          <p:cNvSpPr txBox="1">
+            <a:spLocks noGrp="1"/>
+          </p:cNvSpPr>
+          <p:nvPr>
+            <p:ph type="subTitle" idx="4294967295"/>
+          </p:nvPr>
+        </p:nvSpPr>
+        <p:spPr>
+          <a:xfrm>
+            <a:off x="1191942" y="1804020"/>
+            <a:ext cx="4458009" cy="614984"/>
+          </a:xfrm>
+          <a:prstGeom prst="rect">
+            <a:avLst/>
+          </a:prstGeom>
+        </p:spPr>
+        <p:txBody>
+          <a:bodyPr spcFirstLastPara="1" wrap="square" lIns="121900" tIns="121900" rIns="121900" bIns="121900" anchor="b" anchorCtr="0">
+            <a:noAutofit/>
+          </a:bodyPr>
+          <a:lstStyle/>
+          <a:p>
+            <a:pPr marL="0" indent="0">
+              <a:spcBef>
+                <a:spcPts val="800"/>
+              </a:spcBef>
+              <a:buNone/>
+            </a:pPr>
+            <a:r>
+              <a:rPr lang="en-US" sz="3200" b="1">
+                <a:latin typeface="Work Sans" pitchFamily="2" charset="0"/>
+                <a:ea typeface="Work Sans"/>
+                <a:cs typeface="Work Sans"/>
+                <a:sym typeface="Work Sans"/>
+              </a:rPr>
+              <a:t>a) Thư viện pygame</a:t>
+            </a:r>
+            <a:endParaRPr sz="3200" b="1">
+              <a:latin typeface="Work Sans" pitchFamily="2" charset="0"/>
+              <a:ea typeface="Work Sans"/>
+              <a:cs typeface="Work Sans"/>
+              <a:sym typeface="Work Sans"/>
+            </a:endParaRPr>
+          </a:p>
+        </p:txBody>
+      </p:sp>
+      <p:sp>
+        <p:nvSpPr>
+          <p:cNvPr id="86" name="Google Shape;86;p14"/>
+          <p:cNvSpPr txBox="1">
+            <a:spLocks noGrp="1"/>
+          </p:cNvSpPr>
+          <p:nvPr>
+            <p:ph type="sldNum" idx="12"/>
+          </p:nvPr>
+        </p:nvSpPr>
+        <p:spPr>
+          <a:xfrm>
+            <a:off x="10879332" y="5857704"/>
+            <a:ext cx="731600" cy="524800"/>
+          </a:xfrm>
+          <a:prstGeom prst="rect">
+            <a:avLst/>
+          </a:prstGeom>
+        </p:spPr>
+        <p:txBody>
+          <a:bodyPr spcFirstLastPara="1" wrap="square" lIns="121900" tIns="121900" rIns="121900" bIns="121900" anchor="ctr" anchorCtr="0">
+            <a:noAutofit/>
+          </a:bodyPr>
+          <a:lstStyle/>
+          <a:p>
+            <a:pPr defTabSz="1219170">
+              <a:buClr>
+                <a:srgbClr val="000000"/>
+              </a:buClr>
+            </a:pPr>
+            <a:fld id="{00000000-1234-1234-1234-123412341234}" type="slidenum">
+              <a:rPr lang="en" kern="0">
+                <a:solidFill>
+                  <a:srgbClr val="000000"/>
+                </a:solidFill>
                 <a:latin typeface="Work Sans" pitchFamily="2" charset="0"/>
               </a:rPr>
               <a:pPr defTabSz="1219170">
@@ -10928,7 +12711,7 @@
                   <a:srgbClr val="000000"/>
                 </a:buClr>
               </a:pPr>
-              <a:t>4</a:t>
+              <a:t>5</a:t>
             </a:fld>
             <a:endParaRPr kern="0">
               <a:solidFill>
@@ -11282,7 +13065,7 @@
 </p:sld>
 </file>
 
-<file path=ppt/slides/slide5.xml><?xml version="1.0" encoding="utf-8"?>
+<file path=ppt/slides/slide6.xml><?xml version="1.0" encoding="utf-8"?>
 <p:sld xmlns:a="http://schemas.openxmlformats.org/drawingml/2006/main" xmlns:r="http://schemas.openxmlformats.org/officeDocument/2006/relationships" xmlns:p="http://schemas.openxmlformats.org/presentationml/2006/main">
   <p:cSld>
     <p:spTree>
@@ -11423,7 +13206,7 @@
                   <a:srgbClr val="000000"/>
                 </a:buClr>
               </a:pPr>
-              <a:t>5</a:t>
+              <a:t>6</a:t>
             </a:fld>
             <a:endParaRPr kern="0">
               <a:solidFill>
@@ -11599,7 +13382,7 @@
 </p:sld>
 </file>
 
-<file path=ppt/slides/slide6.xml><?xml version="1.0" encoding="utf-8"?>
+<file path=ppt/slides/slide7.xml><?xml version="1.0" encoding="utf-8"?>
 <p:sld xmlns:a="http://schemas.openxmlformats.org/drawingml/2006/main" xmlns:r="http://schemas.openxmlformats.org/officeDocument/2006/relationships" xmlns:p="http://schemas.openxmlformats.org/presentationml/2006/main">
   <p:cSld>
     <p:spTree>
@@ -11690,7 +13473,7 @@
                   <a:srgbClr val="000000"/>
                 </a:buClr>
               </a:pPr>
-              <a:t>6</a:t>
+              <a:t>7</a:t>
             </a:fld>
             <a:endParaRPr kern="0">
               <a:solidFill>
@@ -11860,7 +13643,7 @@
 </p:sld>
 </file>
 
-<file path=ppt/slides/slide7.xml><?xml version="1.0" encoding="utf-8"?>
+<file path=ppt/slides/slide8.xml><?xml version="1.0" encoding="utf-8"?>
 <p:sld xmlns:a="http://schemas.openxmlformats.org/drawingml/2006/main" xmlns:r="http://schemas.openxmlformats.org/officeDocument/2006/relationships" xmlns:p="http://schemas.openxmlformats.org/presentationml/2006/main">
   <p:cSld>
     <p:spTree>
@@ -11901,7 +13684,7 @@
             <a:fld id="{00000000-1234-1234-1234-123412341234}" type="slidenum">
               <a:rPr lang="en" smtClean="0"/>
               <a:pPr/>
-              <a:t>7</a:t>
+              <a:t>8</a:t>
             </a:fld>
             <a:endParaRPr lang="en"/>
           </a:p>
@@ -11999,7 +13782,7 @@
 </p:sld>
 </file>
 
-<file path=ppt/slides/slide8.xml><?xml version="1.0" encoding="utf-8"?>
+<file path=ppt/slides/slide9.xml><?xml version="1.0" encoding="utf-8"?>
 <p:sld xmlns:a="http://schemas.openxmlformats.org/drawingml/2006/main" xmlns:r="http://schemas.openxmlformats.org/officeDocument/2006/relationships" xmlns:p="http://schemas.openxmlformats.org/presentationml/2006/main">
   <p:cSld>
     <p:spTree>
@@ -12090,7 +13873,7 @@
                   <a:srgbClr val="000000"/>
                 </a:buClr>
               </a:pPr>
-              <a:t>8</a:t>
+              <a:t>9</a:t>
             </a:fld>
             <a:endParaRPr kern="0">
               <a:solidFill>
@@ -12282,274 +14065,6 @@
     <p:extLst>
       <p:ext uri="{BB962C8B-B14F-4D97-AF65-F5344CB8AC3E}">
         <p14:creationId xmlns:p14="http://schemas.microsoft.com/office/powerpoint/2010/main" val="3689464734"/>
-      </p:ext>
-    </p:extLst>
-  </p:cSld>
-  <p:clrMapOvr>
-    <a:masterClrMapping/>
-  </p:clrMapOvr>
-</p:sld>
-</file>
-
-<file path=ppt/slides/slide9.xml><?xml version="1.0" encoding="utf-8"?>
-<p:sld xmlns:a="http://schemas.openxmlformats.org/drawingml/2006/main" xmlns:r="http://schemas.openxmlformats.org/officeDocument/2006/relationships" xmlns:p="http://schemas.openxmlformats.org/presentationml/2006/main">
-  <p:cSld>
-    <p:spTree>
-      <p:nvGrpSpPr>
-        <p:cNvPr id="1" name="Shape 82"/>
-        <p:cNvGrpSpPr/>
-        <p:nvPr/>
-      </p:nvGrpSpPr>
-      <p:grpSpPr>
-        <a:xfrm>
-          <a:off x="0" y="0"/>
-          <a:ext cx="0" cy="0"/>
-          <a:chOff x="0" y="0"/>
-          <a:chExt cx="0" cy="0"/>
-        </a:xfrm>
-      </p:grpSpPr>
-      <p:sp>
-        <p:nvSpPr>
-          <p:cNvPr id="83" name="Google Shape;83;p14"/>
-          <p:cNvSpPr txBox="1">
-            <a:spLocks noGrp="1"/>
-          </p:cNvSpPr>
-          <p:nvPr>
-            <p:ph type="ctrTitle" idx="4294967295"/>
-          </p:nvPr>
-        </p:nvSpPr>
-        <p:spPr>
-          <a:xfrm>
-            <a:off x="829056" y="731520"/>
-            <a:ext cx="10533887" cy="1362456"/>
-          </a:xfrm>
-          <a:prstGeom prst="rect">
-            <a:avLst/>
-          </a:prstGeom>
-        </p:spPr>
-        <p:txBody>
-          <a:bodyPr spcFirstLastPara="1" wrap="square" lIns="121900" tIns="121900" rIns="121900" bIns="121900" anchor="b" anchorCtr="0">
-            <a:noAutofit/>
-          </a:bodyPr>
-          <a:lstStyle/>
-          <a:p>
-            <a:r>
-              <a:rPr lang="en-US"/>
-              <a:t>2. Xây dựng DQN đơn giản để huấn luyện dựa trên môi trường.</a:t>
-            </a:r>
-            <a:endParaRPr/>
-          </a:p>
-        </p:txBody>
-      </p:sp>
-      <p:sp>
-        <p:nvSpPr>
-          <p:cNvPr id="86" name="Google Shape;86;p14"/>
-          <p:cNvSpPr txBox="1">
-            <a:spLocks noGrp="1"/>
-          </p:cNvSpPr>
-          <p:nvPr>
-            <p:ph type="sldNum" idx="12"/>
-          </p:nvPr>
-        </p:nvSpPr>
-        <p:spPr>
-          <a:xfrm>
-            <a:off x="10879332" y="5857704"/>
-            <a:ext cx="731600" cy="524800"/>
-          </a:xfrm>
-          <a:prstGeom prst="rect">
-            <a:avLst/>
-          </a:prstGeom>
-        </p:spPr>
-        <p:txBody>
-          <a:bodyPr spcFirstLastPara="1" wrap="square" lIns="121900" tIns="121900" rIns="121900" bIns="121900" anchor="ctr" anchorCtr="0">
-            <a:noAutofit/>
-          </a:bodyPr>
-          <a:lstStyle/>
-          <a:p>
-            <a:pPr defTabSz="1219170">
-              <a:buClr>
-                <a:srgbClr val="000000"/>
-              </a:buClr>
-            </a:pPr>
-            <a:fld id="{00000000-1234-1234-1234-123412341234}" type="slidenum">
-              <a:rPr lang="en" kern="0">
-                <a:solidFill>
-                  <a:srgbClr val="000000"/>
-                </a:solidFill>
-              </a:rPr>
-              <a:pPr defTabSz="1219170">
-                <a:buClr>
-                  <a:srgbClr val="000000"/>
-                </a:buClr>
-              </a:pPr>
-              <a:t>9</a:t>
-            </a:fld>
-            <a:endParaRPr kern="0">
-              <a:solidFill>
-                <a:srgbClr val="000000"/>
-              </a:solidFill>
-            </a:endParaRPr>
-          </a:p>
-        </p:txBody>
-      </p:sp>
-      <p:sp>
-        <p:nvSpPr>
-          <p:cNvPr id="6" name="TextBox 5">
-            <a:extLst>
-              <a:ext uri="{FF2B5EF4-FFF2-40B4-BE49-F238E27FC236}">
-                <a16:creationId xmlns:a16="http://schemas.microsoft.com/office/drawing/2014/main" id="{52929F12-8803-7E23-72DD-E3D8CE88CFBE}"/>
-              </a:ext>
-            </a:extLst>
-          </p:cNvPr>
-          <p:cNvSpPr txBox="1"/>
-          <p:nvPr/>
-        </p:nvSpPr>
-        <p:spPr>
-          <a:xfrm>
-            <a:off x="980179" y="2093976"/>
-            <a:ext cx="5272026" cy="461665"/>
-          </a:xfrm>
-          <a:prstGeom prst="rect">
-            <a:avLst/>
-          </a:prstGeom>
-          <a:noFill/>
-        </p:spPr>
-        <p:txBody>
-          <a:bodyPr wrap="square" rtlCol="0">
-            <a:spAutoFit/>
-          </a:bodyPr>
-          <a:lstStyle/>
-          <a:p>
-            <a:r>
-              <a:rPr lang="en-US" sz="2400" b="1"/>
-              <a:t>b) Lớp QTrainer</a:t>
-            </a:r>
-          </a:p>
-        </p:txBody>
-      </p:sp>
-      <p:sp>
-        <p:nvSpPr>
-          <p:cNvPr id="7" name="TextBox 6">
-            <a:extLst>
-              <a:ext uri="{FF2B5EF4-FFF2-40B4-BE49-F238E27FC236}">
-                <a16:creationId xmlns:a16="http://schemas.microsoft.com/office/drawing/2014/main" id="{03F28572-F00E-DBD9-CB96-B01B975EB7C1}"/>
-              </a:ext>
-            </a:extLst>
-          </p:cNvPr>
-          <p:cNvSpPr txBox="1"/>
-          <p:nvPr/>
-        </p:nvSpPr>
-        <p:spPr>
-          <a:xfrm>
-            <a:off x="1271016" y="2724912"/>
-            <a:ext cx="4901184" cy="3416320"/>
-          </a:xfrm>
-          <a:prstGeom prst="rect">
-            <a:avLst/>
-          </a:prstGeom>
-          <a:noFill/>
-        </p:spPr>
-        <p:txBody>
-          <a:bodyPr wrap="square" rtlCol="0">
-            <a:spAutoFit/>
-          </a:bodyPr>
-          <a:lstStyle/>
-          <a:p>
-            <a:pPr marL="285750" indent="-285750">
-              <a:buFont typeface="Arial" panose="020B0604020202020204" pitchFamily="34" charset="0"/>
-              <a:buChar char="•"/>
-            </a:pPr>
-            <a:r>
-              <a:rPr lang="en-US" b="1"/>
-              <a:t>Kiểm tra state là mẫu đơn(simple sample) và thực hiện chuyển đổi thành batch mẫu nếu cần.</a:t>
-            </a:r>
-          </a:p>
-          <a:p>
-            <a:pPr marL="285750" indent="-285750">
-              <a:buFont typeface="Arial" panose="020B0604020202020204" pitchFamily="34" charset="0"/>
-              <a:buChar char="•"/>
-            </a:pPr>
-            <a:r>
-              <a:rPr lang="en-US" b="1"/>
-              <a:t>Sử dụng model để dự đoán Q cho trạng thái hiện tại(pred).</a:t>
-            </a:r>
-          </a:p>
-          <a:p>
-            <a:pPr marL="285750" indent="-285750">
-              <a:buFont typeface="Arial" panose="020B0604020202020204" pitchFamily="34" charset="0"/>
-              <a:buChar char="•"/>
-            </a:pPr>
-            <a:r>
-              <a:rPr lang="en-US" b="1"/>
-              <a:t>Tính toán Q cho trạng thái tiếp theo dựa trên phương trình Bellman.</a:t>
-            </a:r>
-          </a:p>
-          <a:p>
-            <a:pPr marL="285750" indent="-285750">
-              <a:buFont typeface="Arial" panose="020B0604020202020204" pitchFamily="34" charset="0"/>
-              <a:buChar char="•"/>
-            </a:pPr>
-            <a:r>
-              <a:rPr lang="en-US" b="1"/>
-              <a:t>Cập nhật giá trị Q mục tiêu cho hành động đã thực hiện.</a:t>
-            </a:r>
-          </a:p>
-          <a:p>
-            <a:pPr marL="285750" indent="-285750">
-              <a:buFont typeface="Arial" panose="020B0604020202020204" pitchFamily="34" charset="0"/>
-              <a:buChar char="•"/>
-            </a:pPr>
-            <a:r>
-              <a:rPr lang="en-US" b="1"/>
-              <a:t>Tính toán mất mát bằng hàm MSE, tính toán gradient của mất mát.</a:t>
-            </a:r>
-          </a:p>
-          <a:p>
-            <a:pPr marL="285750" indent="-285750">
-              <a:buFont typeface="Arial" panose="020B0604020202020204" pitchFamily="34" charset="0"/>
-              <a:buChar char="•"/>
-            </a:pPr>
-            <a:r>
-              <a:rPr lang="en-US" b="1"/>
-              <a:t>Cập nhật trọng số cho mạng.</a:t>
-            </a:r>
-          </a:p>
-        </p:txBody>
-      </p:sp>
-      <p:pic>
-        <p:nvPicPr>
-          <p:cNvPr id="3" name="Picture 2">
-            <a:extLst>
-              <a:ext uri="{FF2B5EF4-FFF2-40B4-BE49-F238E27FC236}">
-                <a16:creationId xmlns:a16="http://schemas.microsoft.com/office/drawing/2014/main" id="{B4895FBD-5698-EA6E-A065-52674484F74D}"/>
-              </a:ext>
-            </a:extLst>
-          </p:cNvPr>
-          <p:cNvPicPr>
-            <a:picLocks noChangeAspect="1"/>
-          </p:cNvPicPr>
-          <p:nvPr/>
-        </p:nvPicPr>
-        <p:blipFill>
-          <a:blip r:embed="rId3"/>
-          <a:stretch>
-            <a:fillRect/>
-          </a:stretch>
-        </p:blipFill>
-        <p:spPr>
-          <a:xfrm>
-            <a:off x="6172200" y="1643260"/>
-            <a:ext cx="5098572" cy="4497972"/>
-          </a:xfrm>
-          <a:prstGeom prst="rect">
-            <a:avLst/>
-          </a:prstGeom>
-        </p:spPr>
-      </p:pic>
-    </p:spTree>
-    <p:extLst>
-      <p:ext uri="{BB962C8B-B14F-4D97-AF65-F5344CB8AC3E}">
-        <p14:creationId xmlns:p14="http://schemas.microsoft.com/office/powerpoint/2010/main" val="141269347"/>
       </p:ext>
     </p:extLst>
   </p:cSld>
@@ -13156,15 +14671,6 @@
 </file>
 
 <file path=customXml/item1.xml><?xml version="1.0" encoding="utf-8"?>
-<?mso-contentType ?>
-<FormTemplates xmlns="http://schemas.microsoft.com/sharepoint/v3/contenttype/forms">
-  <Display>DocumentLibraryForm</Display>
-  <Edit>DocumentLibraryForm</Edit>
-  <New>DocumentLibraryForm</New>
-</FormTemplates>
-</file>
-
-<file path=customXml/item2.xml><?xml version="1.0" encoding="utf-8"?>
 <ct:contentTypeSchema xmlns:ct="http://schemas.microsoft.com/office/2006/metadata/contentType" xmlns:ma="http://schemas.microsoft.com/office/2006/metadata/properties/metaAttributes" ct:_="" ma:_="" ma:contentTypeName="Document" ma:contentTypeID="0x0101000E7E78477CFC374E8AA82542E218E7EC" ma:contentTypeVersion="6" ma:contentTypeDescription="Create a new document." ma:contentTypeScope="" ma:versionID="4443b9941a9a16f5cb162e4c8d951a7b">
   <xsd:schema xmlns:xsd="http://www.w3.org/2001/XMLSchema" xmlns:xs="http://www.w3.org/2001/XMLSchema" xmlns:p="http://schemas.microsoft.com/office/2006/metadata/properties" xmlns:ns3="857cb085-a7c1-4b61-acd5-9c3c02b8cdd6" targetNamespace="http://schemas.microsoft.com/office/2006/metadata/properties" ma:root="true" ma:fieldsID="5bf1f170dcecdf132d85355f0420a736" ns3:_="">
     <xsd:import namespace="857cb085-a7c1-4b61-acd5-9c3c02b8cdd6"/>
@@ -13320,6 +14826,15 @@
 </ct:contentTypeSchema>
 </file>
 
+<file path=customXml/item2.xml><?xml version="1.0" encoding="utf-8"?>
+<?mso-contentType ?>
+<FormTemplates xmlns="http://schemas.microsoft.com/sharepoint/v3/contenttype/forms">
+  <Display>DocumentLibraryForm</Display>
+  <Edit>DocumentLibraryForm</Edit>
+  <New>DocumentLibraryForm</New>
+</FormTemplates>
+</file>
+
 <file path=customXml/item3.xml><?xml version="1.0" encoding="utf-8"?>
 <p:properties xmlns:p="http://schemas.microsoft.com/office/2006/metadata/properties" xmlns:xsi="http://www.w3.org/2001/XMLSchema-instance" xmlns:pc="http://schemas.microsoft.com/office/infopath/2007/PartnerControls">
   <documentManagement>
@@ -13329,14 +14844,6 @@
 </file>
 
 <file path=customXml/itemProps1.xml><?xml version="1.0" encoding="utf-8"?>
-<ds:datastoreItem xmlns:ds="http://schemas.openxmlformats.org/officeDocument/2006/customXml" ds:itemID="{CB72ECE1-767A-499C-82E3-3BD143CD37E0}">
-  <ds:schemaRefs>
-    <ds:schemaRef ds:uri="http://schemas.microsoft.com/sharepoint/v3/contenttype/forms"/>
-  </ds:schemaRefs>
-</ds:datastoreItem>
-</file>
-
-<file path=customXml/itemProps2.xml><?xml version="1.0" encoding="utf-8"?>
 <ds:datastoreItem xmlns:ds="http://schemas.openxmlformats.org/officeDocument/2006/customXml" ds:itemID="{B379F961-0EC3-4B32-B0AD-709632C55AC8}">
   <ds:schemaRefs>
     <ds:schemaRef ds:uri="http://schemas.microsoft.com/office/2006/metadata/contentType"/>
@@ -13350,6 +14857,14 @@
     <ds:schemaRef ds:uri="http://purl.org/dc/elements/1.1/"/>
     <ds:schemaRef ds:uri="http://purl.org/dc/terms/"/>
     <ds:schemaRef ds:uri="http://schemas.microsoft.com/internal/obd"/>
+  </ds:schemaRefs>
+</ds:datastoreItem>
+</file>
+
+<file path=customXml/itemProps2.xml><?xml version="1.0" encoding="utf-8"?>
+<ds:datastoreItem xmlns:ds="http://schemas.openxmlformats.org/officeDocument/2006/customXml" ds:itemID="{CB72ECE1-767A-499C-82E3-3BD143CD37E0}">
+  <ds:schemaRefs>
+    <ds:schemaRef ds:uri="http://schemas.microsoft.com/sharepoint/v3/contenttype/forms"/>
   </ds:schemaRefs>
 </ds:datastoreItem>
 </file>
